--- a/FILES/literature-survey.pptx
+++ b/FILES/literature-survey.pptx
@@ -126,7 +126,7 @@
 <file path=ppt/revisionInfo.xml><?xml version="1.0" encoding="utf-8"?>
 <p1510:revInfo xmlns:a="http://schemas.openxmlformats.org/drawingml/2006/main" xmlns:r="http://schemas.openxmlformats.org/officeDocument/2006/relationships" xmlns:p1510="http://schemas.microsoft.com/office/powerpoint/2015/10/main">
   <p1510:revLst>
-    <p1510:client id="{916F478F-089F-48EB-9695-5C1991CD97E9}" v="24" dt="2025-04-20T10:09:18.957"/>
+    <p1510:client id="{916F478F-089F-48EB-9695-5C1991CD97E9}" v="32" dt="2025-04-22T06:16:13.613"/>
   </p1510:revLst>
 </p1510:revInfo>
 </file>
@@ -135,8 +135,8 @@
 <pc:chgInfo xmlns:a="http://schemas.openxmlformats.org/drawingml/2006/main" xmlns:r="http://schemas.openxmlformats.org/officeDocument/2006/relationships" xmlns:ac="http://schemas.microsoft.com/office/drawing/2013/main/command" xmlns:pc="http://schemas.microsoft.com/office/powerpoint/2013/main/command">
   <pc:docChgLst>
     <pc:chgData name="sruthika katipalli" userId="40ee7db3f3b20d47" providerId="LiveId" clId="{916F478F-089F-48EB-9695-5C1991CD97E9}"/>
-    <pc:docChg chg="undo redo custSel addSld delSld modSld">
-      <pc:chgData name="sruthika katipalli" userId="40ee7db3f3b20d47" providerId="LiveId" clId="{916F478F-089F-48EB-9695-5C1991CD97E9}" dt="2025-04-20T10:09:34.265" v="936" actId="14100"/>
+    <pc:docChg chg="undo redo custSel addSld delSld modSld sldOrd">
+      <pc:chgData name="sruthika katipalli" userId="40ee7db3f3b20d47" providerId="LiveId" clId="{916F478F-089F-48EB-9695-5C1991CD97E9}" dt="2025-04-22T07:29:45.361" v="1069"/>
       <pc:docMkLst>
         <pc:docMk/>
       </pc:docMkLst>
@@ -147,8 +147,8 @@
           <pc:sldMk cId="831704915" sldId="272"/>
         </pc:sldMkLst>
       </pc:sldChg>
-      <pc:sldChg chg="modSp new mod">
-        <pc:chgData name="sruthika katipalli" userId="40ee7db3f3b20d47" providerId="LiveId" clId="{916F478F-089F-48EB-9695-5C1991CD97E9}" dt="2025-04-20T05:37:59.798" v="25" actId="14100"/>
+      <pc:sldChg chg="addSp modSp new mod ord">
+        <pc:chgData name="sruthika katipalli" userId="40ee7db3f3b20d47" providerId="LiveId" clId="{916F478F-089F-48EB-9695-5C1991CD97E9}" dt="2025-04-22T07:29:45.361" v="1069"/>
         <pc:sldMkLst>
           <pc:docMk/>
           <pc:sldMk cId="110786674" sldId="273"/>
@@ -161,9 +161,17 @@
             <ac:spMk id="2" creationId="{0BC456DA-1C3D-D953-4FD5-B82D7F43FA63}"/>
           </ac:spMkLst>
         </pc:spChg>
+        <pc:picChg chg="add mod">
+          <ac:chgData name="sruthika katipalli" userId="40ee7db3f3b20d47" providerId="LiveId" clId="{916F478F-089F-48EB-9695-5C1991CD97E9}" dt="2025-04-22T06:16:26.610" v="1067" actId="1076"/>
+          <ac:picMkLst>
+            <pc:docMk/>
+            <pc:sldMk cId="110786674" sldId="273"/>
+            <ac:picMk id="4" creationId="{8087009E-2209-A6B8-C08A-6E3493A5A688}"/>
+          </ac:picMkLst>
+        </pc:picChg>
       </pc:sldChg>
       <pc:sldChg chg="addSp delSp modSp new mod">
-        <pc:chgData name="sruthika katipalli" userId="40ee7db3f3b20d47" providerId="LiveId" clId="{916F478F-089F-48EB-9695-5C1991CD97E9}" dt="2025-04-20T06:22:31.228" v="550" actId="1076"/>
+        <pc:chgData name="sruthika katipalli" userId="40ee7db3f3b20d47" providerId="LiveId" clId="{916F478F-089F-48EB-9695-5C1991CD97E9}" dt="2025-04-22T04:24:34.835" v="1047" actId="931"/>
         <pc:sldMkLst>
           <pc:docMk/>
           <pc:sldMk cId="2067916261" sldId="274"/>
@@ -176,72 +184,56 @@
             <ac:spMk id="2" creationId="{C8A7655C-513F-196A-E6DC-A07411859AAA}"/>
           </ac:spMkLst>
         </pc:spChg>
-        <pc:spChg chg="add mod">
-          <ac:chgData name="sruthika katipalli" userId="40ee7db3f3b20d47" providerId="LiveId" clId="{916F478F-089F-48EB-9695-5C1991CD97E9}" dt="2025-04-20T05:51:31.805" v="179" actId="14100"/>
+        <pc:spChg chg="add del mod">
+          <ac:chgData name="sruthika katipalli" userId="40ee7db3f3b20d47" providerId="LiveId" clId="{916F478F-089F-48EB-9695-5C1991CD97E9}" dt="2025-04-21T10:42:25.179" v="1027" actId="478"/>
           <ac:spMkLst>
             <pc:docMk/>
             <pc:sldMk cId="2067916261" sldId="274"/>
             <ac:spMk id="5" creationId="{E723D808-9784-CE8E-774B-DA3124A45650}"/>
           </ac:spMkLst>
         </pc:spChg>
-        <pc:spChg chg="add del">
-          <ac:chgData name="sruthika katipalli" userId="40ee7db3f3b20d47" providerId="LiveId" clId="{916F478F-089F-48EB-9695-5C1991CD97E9}" dt="2025-04-20T05:47:54.668" v="102" actId="21"/>
-          <ac:spMkLst>
-            <pc:docMk/>
-            <pc:sldMk cId="2067916261" sldId="274"/>
-            <ac:spMk id="6" creationId="{F022A9A2-C60E-8877-629D-39A0C3664FC3}"/>
-          </ac:spMkLst>
-        </pc:spChg>
-        <pc:spChg chg="add del">
-          <ac:chgData name="sruthika katipalli" userId="40ee7db3f3b20d47" providerId="LiveId" clId="{916F478F-089F-48EB-9695-5C1991CD97E9}" dt="2025-04-20T05:48:15.539" v="104" actId="21"/>
-          <ac:spMkLst>
-            <pc:docMk/>
-            <pc:sldMk cId="2067916261" sldId="274"/>
-            <ac:spMk id="7" creationId="{13DFC3DB-24E2-3B5A-7756-DE7FC4A09DF9}"/>
-          </ac:spMkLst>
-        </pc:spChg>
-        <pc:spChg chg="add mod">
-          <ac:chgData name="sruthika katipalli" userId="40ee7db3f3b20d47" providerId="LiveId" clId="{916F478F-089F-48EB-9695-5C1991CD97E9}" dt="2025-04-20T05:49:44.943" v="149" actId="20577"/>
+        <pc:spChg chg="add del mod">
+          <ac:chgData name="sruthika katipalli" userId="40ee7db3f3b20d47" providerId="LiveId" clId="{916F478F-089F-48EB-9695-5C1991CD97E9}" dt="2025-04-21T10:42:28.404" v="1028" actId="478"/>
           <ac:spMkLst>
             <pc:docMk/>
             <pc:sldMk cId="2067916261" sldId="274"/>
             <ac:spMk id="8" creationId="{B13C9764-8664-4A8D-EAA6-B34C23E2E468}"/>
           </ac:spMkLst>
         </pc:spChg>
-        <pc:spChg chg="add mod">
-          <ac:chgData name="sruthika katipalli" userId="40ee7db3f3b20d47" providerId="LiveId" clId="{916F478F-089F-48EB-9695-5C1991CD97E9}" dt="2025-04-20T05:51:37.436" v="180" actId="1076"/>
+        <pc:spChg chg="add del mod">
+          <ac:chgData name="sruthika katipalli" userId="40ee7db3f3b20d47" providerId="LiveId" clId="{916F478F-089F-48EB-9695-5C1991CD97E9}" dt="2025-04-21T10:42:30.844" v="1029" actId="478"/>
           <ac:spMkLst>
             <pc:docMk/>
             <pc:sldMk cId="2067916261" sldId="274"/>
             <ac:spMk id="9" creationId="{179A8C26-576B-9775-F662-0B42D63532BA}"/>
           </ac:spMkLst>
         </pc:spChg>
-        <pc:spChg chg="add mod">
-          <ac:chgData name="sruthika katipalli" userId="40ee7db3f3b20d47" providerId="LiveId" clId="{916F478F-089F-48EB-9695-5C1991CD97E9}" dt="2025-04-20T05:54:25.052" v="243" actId="20577"/>
+        <pc:spChg chg="add del mod">
+          <ac:chgData name="sruthika katipalli" userId="40ee7db3f3b20d47" providerId="LiveId" clId="{916F478F-089F-48EB-9695-5C1991CD97E9}" dt="2025-04-21T10:42:33.057" v="1030" actId="478"/>
           <ac:spMkLst>
             <pc:docMk/>
             <pc:sldMk cId="2067916261" sldId="274"/>
             <ac:spMk id="10" creationId="{A1AB5E45-074B-5F0B-7FEE-E1178DEC4B2E}"/>
           </ac:spMkLst>
         </pc:spChg>
-        <pc:spChg chg="add mod">
-          <ac:chgData name="sruthika katipalli" userId="40ee7db3f3b20d47" providerId="LiveId" clId="{916F478F-089F-48EB-9695-5C1991CD97E9}" dt="2025-04-20T05:55:29.169" v="268" actId="14100"/>
+        <pc:spChg chg="add del mod">
+          <ac:chgData name="sruthika katipalli" userId="40ee7db3f3b20d47" providerId="LiveId" clId="{916F478F-089F-48EB-9695-5C1991CD97E9}" dt="2025-04-21T10:42:41.079" v="1032" actId="478"/>
           <ac:spMkLst>
             <pc:docMk/>
             <pc:sldMk cId="2067916261" sldId="274"/>
             <ac:spMk id="11" creationId="{3D43B074-34B3-BEFE-6AA0-DE0272C1DC23}"/>
           </ac:spMkLst>
         </pc:spChg>
-        <pc:spChg chg="add mod">
-          <ac:chgData name="sruthika katipalli" userId="40ee7db3f3b20d47" providerId="LiveId" clId="{916F478F-089F-48EB-9695-5C1991CD97E9}" dt="2025-04-20T05:56:32.178" v="299" actId="14100"/>
+        <pc:spChg chg="add del mod">
+          <ac:chgData name="sruthika katipalli" userId="40ee7db3f3b20d47" providerId="LiveId" clId="{916F478F-089F-48EB-9695-5C1991CD97E9}" dt="2025-04-21T10:42:43.674" v="1033" actId="478"/>
           <ac:spMkLst>
             <pc:docMk/>
             <pc:sldMk cId="2067916261" sldId="274"/>
             <ac:spMk id="12" creationId="{BEEEA9D5-D532-F5B8-8F7F-422BA735B6D1}"/>
           </ac:spMkLst>
         </pc:spChg>
-        <pc:spChg chg="add mod">
-          <ac:chgData name="sruthika katipalli" userId="40ee7db3f3b20d47" providerId="LiveId" clId="{916F478F-089F-48EB-9695-5C1991CD97E9}" dt="2025-04-20T06:03:12.872" v="342" actId="13822"/>
+        <pc:spChg chg="add del mod">
+          <ac:chgData name="sruthika katipalli" userId="40ee7db3f3b20d47" providerId="LiveId" clId="{916F478F-089F-48EB-9695-5C1991CD97E9}" dt="2025-04-21T10:42:07.532" v="1020" actId="478"/>
           <ac:spMkLst>
             <pc:docMk/>
             <pc:sldMk cId="2067916261" sldId="274"/>
@@ -249,95 +241,87 @@
           </ac:spMkLst>
         </pc:spChg>
         <pc:spChg chg="add del mod">
-          <ac:chgData name="sruthika katipalli" userId="40ee7db3f3b20d47" providerId="LiveId" clId="{916F478F-089F-48EB-9695-5C1991CD97E9}" dt="2025-04-20T06:01:22.210" v="321" actId="478"/>
-          <ac:spMkLst>
-            <pc:docMk/>
-            <pc:sldMk cId="2067916261" sldId="274"/>
-            <ac:spMk id="25" creationId="{FC556C87-9153-201D-0FC9-EF2946491EB3}"/>
-          </ac:spMkLst>
-        </pc:spChg>
-        <pc:spChg chg="add mod">
-          <ac:chgData name="sruthika katipalli" userId="40ee7db3f3b20d47" providerId="LiveId" clId="{916F478F-089F-48EB-9695-5C1991CD97E9}" dt="2025-04-20T06:01:49.903" v="330" actId="14100"/>
+          <ac:chgData name="sruthika katipalli" userId="40ee7db3f3b20d47" providerId="LiveId" clId="{916F478F-089F-48EB-9695-5C1991CD97E9}" dt="2025-04-21T10:42:54.023" v="1040"/>
           <ac:spMkLst>
             <pc:docMk/>
             <pc:sldMk cId="2067916261" sldId="274"/>
             <ac:spMk id="26" creationId="{EC41FCD0-46B9-8669-6E15-42ECDC51653C}"/>
           </ac:spMkLst>
         </pc:spChg>
-        <pc:picChg chg="add del mod">
-          <ac:chgData name="sruthika katipalli" userId="40ee7db3f3b20d47" providerId="LiveId" clId="{916F478F-089F-48EB-9695-5C1991CD97E9}" dt="2025-04-20T05:45:50.107" v="73" actId="21"/>
+        <pc:picChg chg="add mod">
+          <ac:chgData name="sruthika katipalli" userId="40ee7db3f3b20d47" providerId="LiveId" clId="{916F478F-089F-48EB-9695-5C1991CD97E9}" dt="2025-04-22T04:24:34.835" v="1047" actId="931"/>
           <ac:picMkLst>
             <pc:docMk/>
             <pc:sldMk cId="2067916261" sldId="274"/>
-            <ac:picMk id="4" creationId="{5FFE07ED-E90A-BD18-0277-0670EDC4348F}"/>
+            <ac:picMk id="4" creationId="{168FD908-FD1E-D379-AA76-1186A3978EBF}"/>
           </ac:picMkLst>
         </pc:picChg>
-        <pc:cxnChg chg="add mod">
-          <ac:chgData name="sruthika katipalli" userId="40ee7db3f3b20d47" providerId="LiveId" clId="{916F478F-089F-48EB-9695-5C1991CD97E9}" dt="2025-04-20T06:03:03.201" v="340" actId="13822"/>
+        <pc:cxnChg chg="add del mod">
+          <ac:chgData name="sruthika katipalli" userId="40ee7db3f3b20d47" providerId="LiveId" clId="{916F478F-089F-48EB-9695-5C1991CD97E9}" dt="2025-04-21T10:43:00.812" v="1043" actId="478"/>
           <ac:cxnSpMkLst>
             <pc:docMk/>
             <pc:sldMk cId="2067916261" sldId="274"/>
             <ac:cxnSpMk id="15" creationId="{14E0C42B-F9C1-62E1-5D2A-CC41F8D3572A}"/>
           </ac:cxnSpMkLst>
         </pc:cxnChg>
-        <pc:cxnChg chg="add mod">
-          <ac:chgData name="sruthika katipalli" userId="40ee7db3f3b20d47" providerId="LiveId" clId="{916F478F-089F-48EB-9695-5C1991CD97E9}" dt="2025-04-20T06:02:59.051" v="339" actId="13822"/>
+        <pc:cxnChg chg="add del mod">
+          <ac:chgData name="sruthika katipalli" userId="40ee7db3f3b20d47" providerId="LiveId" clId="{916F478F-089F-48EB-9695-5C1991CD97E9}" dt="2025-04-21T10:42:54.022" v="1038" actId="478"/>
           <ac:cxnSpMkLst>
             <pc:docMk/>
             <pc:sldMk cId="2067916261" sldId="274"/>
             <ac:cxnSpMk id="18" creationId="{C282C345-E2AA-1D9D-1CC3-57E67CC6713B}"/>
           </ac:cxnSpMkLst>
         </pc:cxnChg>
-        <pc:cxnChg chg="add mod">
-          <ac:chgData name="sruthika katipalli" userId="40ee7db3f3b20d47" providerId="LiveId" clId="{916F478F-089F-48EB-9695-5C1991CD97E9}" dt="2025-04-20T06:02:54.884" v="338" actId="13822"/>
+        <pc:cxnChg chg="add del mod">
+          <ac:chgData name="sruthika katipalli" userId="40ee7db3f3b20d47" providerId="LiveId" clId="{916F478F-089F-48EB-9695-5C1991CD97E9}" dt="2025-04-21T10:42:56.233" v="1041" actId="478"/>
           <ac:cxnSpMkLst>
             <pc:docMk/>
             <pc:sldMk cId="2067916261" sldId="274"/>
             <ac:cxnSpMk id="20" creationId="{BE699155-8AEA-808A-D550-8C0276D94BF6}"/>
           </ac:cxnSpMkLst>
         </pc:cxnChg>
-        <pc:cxnChg chg="add mod">
-          <ac:chgData name="sruthika katipalli" userId="40ee7db3f3b20d47" providerId="LiveId" clId="{916F478F-089F-48EB-9695-5C1991CD97E9}" dt="2025-04-20T06:02:50.918" v="337" actId="13822"/>
+        <pc:cxnChg chg="add del mod">
+          <ac:chgData name="sruthika katipalli" userId="40ee7db3f3b20d47" providerId="LiveId" clId="{916F478F-089F-48EB-9695-5C1991CD97E9}" dt="2025-04-21T10:42:58.559" v="1042" actId="478"/>
           <ac:cxnSpMkLst>
             <pc:docMk/>
             <pc:sldMk cId="2067916261" sldId="274"/>
             <ac:cxnSpMk id="22" creationId="{D96C8BEF-20F2-0A8E-CCF2-686BA95F8F91}"/>
           </ac:cxnSpMkLst>
         </pc:cxnChg>
-        <pc:cxnChg chg="add mod">
-          <ac:chgData name="sruthika katipalli" userId="40ee7db3f3b20d47" providerId="LiveId" clId="{916F478F-089F-48EB-9695-5C1991CD97E9}" dt="2025-04-20T06:02:46.650" v="336" actId="13822"/>
+        <pc:cxnChg chg="add del mod">
+          <ac:chgData name="sruthika katipalli" userId="40ee7db3f3b20d47" providerId="LiveId" clId="{916F478F-089F-48EB-9695-5C1991CD97E9}" dt="2025-04-21T10:42:09.687" v="1021" actId="478"/>
           <ac:cxnSpMkLst>
             <pc:docMk/>
             <pc:sldMk cId="2067916261" sldId="274"/>
             <ac:cxnSpMk id="28" creationId="{D67F202C-AB1B-FAFC-5E71-BEE2F576E534}"/>
           </ac:cxnSpMkLst>
         </pc:cxnChg>
-        <pc:cxnChg chg="add mod">
-          <ac:chgData name="sruthika katipalli" userId="40ee7db3f3b20d47" providerId="LiveId" clId="{916F478F-089F-48EB-9695-5C1991CD97E9}" dt="2025-04-20T06:02:40.586" v="335" actId="13822"/>
+        <pc:cxnChg chg="add del mod">
+          <ac:chgData name="sruthika katipalli" userId="40ee7db3f3b20d47" providerId="LiveId" clId="{916F478F-089F-48EB-9695-5C1991CD97E9}" dt="2025-04-21T10:42:11.792" v="1022" actId="478"/>
           <ac:cxnSpMkLst>
             <pc:docMk/>
             <pc:sldMk cId="2067916261" sldId="274"/>
             <ac:cxnSpMk id="31" creationId="{63A7FE14-34FC-8794-9670-66D5C863986D}"/>
           </ac:cxnSpMkLst>
         </pc:cxnChg>
-        <pc:cxnChg chg="add mod">
-          <ac:chgData name="sruthika katipalli" userId="40ee7db3f3b20d47" providerId="LiveId" clId="{916F478F-089F-48EB-9695-5C1991CD97E9}" dt="2025-04-20T06:03:45.384" v="345" actId="13822"/>
+        <pc:cxnChg chg="add del mod">
+          <ac:chgData name="sruthika katipalli" userId="40ee7db3f3b20d47" providerId="LiveId" clId="{916F478F-089F-48EB-9695-5C1991CD97E9}" dt="2025-04-21T10:42:14.136" v="1023" actId="478"/>
           <ac:cxnSpMkLst>
             <pc:docMk/>
             <pc:sldMk cId="2067916261" sldId="274"/>
             <ac:cxnSpMk id="34" creationId="{4B0CE014-C0C0-4757-4258-A1A21FE6006D}"/>
           </ac:cxnSpMkLst>
         </pc:cxnChg>
-        <pc:cxnChg chg="add mod">
-          <ac:chgData name="sruthika katipalli" userId="40ee7db3f3b20d47" providerId="LiveId" clId="{916F478F-089F-48EB-9695-5C1991CD97E9}" dt="2025-04-20T06:03:58.271" v="348" actId="13822"/>
+        <pc:cxnChg chg="add del mod">
+          <ac:chgData name="sruthika katipalli" userId="40ee7db3f3b20d47" providerId="LiveId" clId="{916F478F-089F-48EB-9695-5C1991CD97E9}" dt="2025-04-21T10:42:16.354" v="1024" actId="478"/>
           <ac:cxnSpMkLst>
             <pc:docMk/>
             <pc:sldMk cId="2067916261" sldId="274"/>
             <ac:cxnSpMk id="37" creationId="{50CA53F6-83EC-76CD-2955-C0595FDAE11E}"/>
           </ac:cxnSpMkLst>
         </pc:cxnChg>
-        <pc:cxnChg chg="add mod">
-          <ac:chgData name="sruthika katipalli" userId="40ee7db3f3b20d47" providerId="LiveId" clId="{916F478F-089F-48EB-9695-5C1991CD97E9}" dt="2025-04-20T06:22:31.228" v="550" actId="1076"/>
+        <pc:cxnChg chg="add del mod">
+          <ac:chgData name="sruthika katipalli" userId="40ee7db3f3b20d47" providerId="LiveId" clId="{916F478F-089F-48EB-9695-5C1991CD97E9}" dt="2025-04-21T10:42:18.885" v="1025" actId="478"/>
           <ac:cxnSpMkLst>
             <pc:docMk/>
             <pc:sldMk cId="2067916261" sldId="274"/>
@@ -346,7 +330,7 @@
         </pc:cxnChg>
       </pc:sldChg>
       <pc:sldChg chg="addSp delSp modSp new mod">
-        <pc:chgData name="sruthika katipalli" userId="40ee7db3f3b20d47" providerId="LiveId" clId="{916F478F-089F-48EB-9695-5C1991CD97E9}" dt="2025-04-20T06:52:53.904" v="809" actId="21"/>
+        <pc:chgData name="sruthika katipalli" userId="40ee7db3f3b20d47" providerId="LiveId" clId="{916F478F-089F-48EB-9695-5C1991CD97E9}" dt="2025-04-22T05:51:05.147" v="1064" actId="14100"/>
         <pc:sldMkLst>
           <pc:docMk/>
           <pc:sldMk cId="3347833306" sldId="275"/>
@@ -360,47 +344,39 @@
           </ac:spMkLst>
         </pc:spChg>
         <pc:spChg chg="add del mod">
-          <ac:chgData name="sruthika katipalli" userId="40ee7db3f3b20d47" providerId="LiveId" clId="{916F478F-089F-48EB-9695-5C1991CD97E9}" dt="2025-04-20T06:10:06.367" v="369" actId="478"/>
-          <ac:spMkLst>
-            <pc:docMk/>
-            <pc:sldMk cId="3347833306" sldId="275"/>
-            <ac:spMk id="5" creationId="{A2EFF7BB-6B0C-F060-D584-B827364E9439}"/>
-          </ac:spMkLst>
-        </pc:spChg>
-        <pc:spChg chg="add mod">
-          <ac:chgData name="sruthika katipalli" userId="40ee7db3f3b20d47" providerId="LiveId" clId="{916F478F-089F-48EB-9695-5C1991CD97E9}" dt="2025-04-20T06:41:28.066" v="559" actId="1076"/>
+          <ac:chgData name="sruthika katipalli" userId="40ee7db3f3b20d47" providerId="LiveId" clId="{916F478F-089F-48EB-9695-5C1991CD97E9}" dt="2025-04-21T10:40:29.151" v="1002" actId="21"/>
           <ac:spMkLst>
             <pc:docMk/>
             <pc:sldMk cId="3347833306" sldId="275"/>
             <ac:spMk id="6" creationId="{A6261F31-C7A1-4E78-80D7-C2865B6924AD}"/>
           </ac:spMkLst>
         </pc:spChg>
-        <pc:spChg chg="add mod">
-          <ac:chgData name="sruthika katipalli" userId="40ee7db3f3b20d47" providerId="LiveId" clId="{916F478F-089F-48EB-9695-5C1991CD97E9}" dt="2025-04-20T06:16:57.909" v="466" actId="1076"/>
+        <pc:spChg chg="add del mod">
+          <ac:chgData name="sruthika katipalli" userId="40ee7db3f3b20d47" providerId="LiveId" clId="{916F478F-089F-48EB-9695-5C1991CD97E9}" dt="2025-04-21T10:39:25.829" v="975" actId="478"/>
           <ac:spMkLst>
             <pc:docMk/>
             <pc:sldMk cId="3347833306" sldId="275"/>
             <ac:spMk id="7" creationId="{215C2DF6-2639-B299-44D5-A2768EFF95B3}"/>
           </ac:spMkLst>
         </pc:spChg>
-        <pc:spChg chg="add mod">
-          <ac:chgData name="sruthika katipalli" userId="40ee7db3f3b20d47" providerId="LiveId" clId="{916F478F-089F-48EB-9695-5C1991CD97E9}" dt="2025-04-20T06:17:08.435" v="468" actId="1076"/>
+        <pc:spChg chg="add del mod">
+          <ac:chgData name="sruthika katipalli" userId="40ee7db3f3b20d47" providerId="LiveId" clId="{916F478F-089F-48EB-9695-5C1991CD97E9}" dt="2025-04-21T10:40:36.658" v="1003" actId="21"/>
           <ac:spMkLst>
             <pc:docMk/>
             <pc:sldMk cId="3347833306" sldId="275"/>
             <ac:spMk id="8" creationId="{97AB9D61-004F-CAED-589E-930CB9251512}"/>
           </ac:spMkLst>
         </pc:spChg>
-        <pc:spChg chg="add mod">
-          <ac:chgData name="sruthika katipalli" userId="40ee7db3f3b20d47" providerId="LiveId" clId="{916F478F-089F-48EB-9695-5C1991CD97E9}" dt="2025-04-20T06:17:17.624" v="469" actId="1076"/>
+        <pc:spChg chg="add del mod">
+          <ac:chgData name="sruthika katipalli" userId="40ee7db3f3b20d47" providerId="LiveId" clId="{916F478F-089F-48EB-9695-5C1991CD97E9}" dt="2025-04-21T10:40:42.158" v="1004" actId="21"/>
           <ac:spMkLst>
             <pc:docMk/>
             <pc:sldMk cId="3347833306" sldId="275"/>
             <ac:spMk id="9" creationId="{488C9EE3-9E48-7DD0-96FD-91CF1621DDD7}"/>
           </ac:spMkLst>
         </pc:spChg>
-        <pc:spChg chg="add mod">
-          <ac:chgData name="sruthika katipalli" userId="40ee7db3f3b20d47" providerId="LiveId" clId="{916F478F-089F-48EB-9695-5C1991CD97E9}" dt="2025-04-20T06:13:36.543" v="444"/>
+        <pc:spChg chg="add del mod">
+          <ac:chgData name="sruthika katipalli" userId="40ee7db3f3b20d47" providerId="LiveId" clId="{916F478F-089F-48EB-9695-5C1991CD97E9}" dt="2025-04-21T10:38:59.218" v="967" actId="478"/>
           <ac:spMkLst>
             <pc:docMk/>
             <pc:sldMk cId="3347833306" sldId="275"/>
@@ -408,31 +384,23 @@
           </ac:spMkLst>
         </pc:spChg>
         <pc:spChg chg="add del mod">
-          <ac:chgData name="sruthika katipalli" userId="40ee7db3f3b20d47" providerId="LiveId" clId="{916F478F-089F-48EB-9695-5C1991CD97E9}" dt="2025-04-20T06:13:48.884" v="447" actId="478"/>
-          <ac:spMkLst>
-            <pc:docMk/>
-            <pc:sldMk cId="3347833306" sldId="275"/>
-            <ac:spMk id="11" creationId="{ED7ED1A8-0303-3B7E-10FE-028C2C90A3C5}"/>
-          </ac:spMkLst>
-        </pc:spChg>
-        <pc:spChg chg="add mod">
-          <ac:chgData name="sruthika katipalli" userId="40ee7db3f3b20d47" providerId="LiveId" clId="{916F478F-089F-48EB-9695-5C1991CD97E9}" dt="2025-04-20T06:42:11.957" v="563" actId="1076"/>
+          <ac:chgData name="sruthika katipalli" userId="40ee7db3f3b20d47" providerId="LiveId" clId="{916F478F-089F-48EB-9695-5C1991CD97E9}" dt="2025-04-21T10:40:24.791" v="1001" actId="21"/>
           <ac:spMkLst>
             <pc:docMk/>
             <pc:sldMk cId="3347833306" sldId="275"/>
             <ac:spMk id="12" creationId="{04C1FA3F-9A73-9C5A-3892-141A6BCFFF3E}"/>
           </ac:spMkLst>
         </pc:spChg>
-        <pc:spChg chg="add mod">
-          <ac:chgData name="sruthika katipalli" userId="40ee7db3f3b20d47" providerId="LiveId" clId="{916F478F-089F-48EB-9695-5C1991CD97E9}" dt="2025-04-20T06:42:19.898" v="564" actId="1076"/>
+        <pc:spChg chg="add del mod">
+          <ac:chgData name="sruthika katipalli" userId="40ee7db3f3b20d47" providerId="LiveId" clId="{916F478F-089F-48EB-9695-5C1991CD97E9}" dt="2025-04-21T10:40:15.392" v="1000" actId="21"/>
           <ac:spMkLst>
             <pc:docMk/>
             <pc:sldMk cId="3347833306" sldId="275"/>
             <ac:spMk id="13" creationId="{6132BB0B-CB70-0811-82D2-440D709C6A72}"/>
           </ac:spMkLst>
         </pc:spChg>
-        <pc:spChg chg="add mod">
-          <ac:chgData name="sruthika katipalli" userId="40ee7db3f3b20d47" providerId="LiveId" clId="{916F478F-089F-48EB-9695-5C1991CD97E9}" dt="2025-04-20T06:42:26.217" v="565" actId="1076"/>
+        <pc:spChg chg="add del mod">
+          <ac:chgData name="sruthika katipalli" userId="40ee7db3f3b20d47" providerId="LiveId" clId="{916F478F-089F-48EB-9695-5C1991CD97E9}" dt="2025-04-21T10:41:14.624" v="1013" actId="478"/>
           <ac:spMkLst>
             <pc:docMk/>
             <pc:sldMk cId="3347833306" sldId="275"/>
@@ -440,143 +408,135 @@
           </ac:spMkLst>
         </pc:spChg>
         <pc:spChg chg="add del mod">
-          <ac:chgData name="sruthika katipalli" userId="40ee7db3f3b20d47" providerId="LiveId" clId="{916F478F-089F-48EB-9695-5C1991CD97E9}" dt="2025-04-20T06:43:29.062" v="571"/>
-          <ac:spMkLst>
-            <pc:docMk/>
-            <pc:sldMk cId="3347833306" sldId="275"/>
-            <ac:spMk id="39" creationId="{BFE2D5F2-0B72-82D6-534C-029863F1C9E5}"/>
-          </ac:spMkLst>
-        </pc:spChg>
-        <pc:spChg chg="add mod">
-          <ac:chgData name="sruthika katipalli" userId="40ee7db3f3b20d47" providerId="LiveId" clId="{916F478F-089F-48EB-9695-5C1991CD97E9}" dt="2025-04-20T06:46:05.299" v="606" actId="14100"/>
+          <ac:chgData name="sruthika katipalli" userId="40ee7db3f3b20d47" providerId="LiveId" clId="{916F478F-089F-48EB-9695-5C1991CD97E9}" dt="2025-04-21T10:40:55.668" v="1010" actId="478"/>
           <ac:spMkLst>
             <pc:docMk/>
             <pc:sldMk cId="3347833306" sldId="275"/>
             <ac:spMk id="49" creationId="{3E2721CB-A404-94AA-5157-153762194B77}"/>
           </ac:spMkLst>
         </pc:spChg>
-        <pc:spChg chg="add mod">
-          <ac:chgData name="sruthika katipalli" userId="40ee7db3f3b20d47" providerId="LiveId" clId="{916F478F-089F-48EB-9695-5C1991CD97E9}" dt="2025-04-20T06:47:18.613" v="658" actId="20577"/>
+        <pc:spChg chg="add del mod">
+          <ac:chgData name="sruthika katipalli" userId="40ee7db3f3b20d47" providerId="LiveId" clId="{916F478F-089F-48EB-9695-5C1991CD97E9}" dt="2025-04-21T10:40:49.461" v="1007" actId="478"/>
           <ac:spMkLst>
             <pc:docMk/>
             <pc:sldMk cId="3347833306" sldId="275"/>
             <ac:spMk id="50" creationId="{5E2985C4-A546-BF43-BACD-90926C315413}"/>
           </ac:spMkLst>
         </pc:spChg>
-        <pc:spChg chg="add mod">
-          <ac:chgData name="sruthika katipalli" userId="40ee7db3f3b20d47" providerId="LiveId" clId="{916F478F-089F-48EB-9695-5C1991CD97E9}" dt="2025-04-20T06:48:16.187" v="709" actId="20577"/>
+        <pc:spChg chg="add del mod">
+          <ac:chgData name="sruthika katipalli" userId="40ee7db3f3b20d47" providerId="LiveId" clId="{916F478F-089F-48EB-9695-5C1991CD97E9}" dt="2025-04-21T10:39:07.116" v="969" actId="478"/>
           <ac:spMkLst>
             <pc:docMk/>
             <pc:sldMk cId="3347833306" sldId="275"/>
             <ac:spMk id="51" creationId="{C7812AC7-6B71-2FC4-D408-FF0293A0F6E8}"/>
           </ac:spMkLst>
         </pc:spChg>
-        <pc:spChg chg="add mod">
-          <ac:chgData name="sruthika katipalli" userId="40ee7db3f3b20d47" providerId="LiveId" clId="{916F478F-089F-48EB-9695-5C1991CD97E9}" dt="2025-04-20T06:52:45.442" v="808" actId="1076"/>
+        <pc:spChg chg="add del mod">
+          <ac:chgData name="sruthika katipalli" userId="40ee7db3f3b20d47" providerId="LiveId" clId="{916F478F-089F-48EB-9695-5C1991CD97E9}" dt="2025-04-21T10:39:52.757" v="997"/>
           <ac:spMkLst>
             <pc:docMk/>
             <pc:sldMk cId="3347833306" sldId="275"/>
             <ac:spMk id="52" creationId="{823E7345-FB29-317A-9E39-A77E0F9E90F7}"/>
           </ac:spMkLst>
         </pc:spChg>
-        <pc:spChg chg="add mod">
-          <ac:chgData name="sruthika katipalli" userId="40ee7db3f3b20d47" providerId="LiveId" clId="{916F478F-089F-48EB-9695-5C1991CD97E9}" dt="2025-04-20T06:52:31.986" v="806" actId="1076"/>
+        <pc:spChg chg="add del mod">
+          <ac:chgData name="sruthika katipalli" userId="40ee7db3f3b20d47" providerId="LiveId" clId="{916F478F-089F-48EB-9695-5C1991CD97E9}" dt="2025-04-21T10:41:24.925" v="1017" actId="478"/>
           <ac:spMkLst>
             <pc:docMk/>
             <pc:sldMk cId="3347833306" sldId="275"/>
             <ac:spMk id="53" creationId="{2F269C5A-4934-33B6-D875-24D97260E8F4}"/>
           </ac:spMkLst>
         </pc:spChg>
-        <pc:spChg chg="add mod">
-          <ac:chgData name="sruthika katipalli" userId="40ee7db3f3b20d47" providerId="LiveId" clId="{916F478F-089F-48EB-9695-5C1991CD97E9}" dt="2025-04-20T06:51:15.848" v="779" actId="20577"/>
+        <pc:spChg chg="add del mod">
+          <ac:chgData name="sruthika katipalli" userId="40ee7db3f3b20d47" providerId="LiveId" clId="{916F478F-089F-48EB-9695-5C1991CD97E9}" dt="2025-04-21T10:41:19.546" v="1015" actId="478"/>
           <ac:spMkLst>
             <pc:docMk/>
             <pc:sldMk cId="3347833306" sldId="275"/>
             <ac:spMk id="54" creationId="{9A6CBF14-C1A8-35C3-CAD9-2C4D31D6B44A}"/>
           </ac:spMkLst>
         </pc:spChg>
-        <pc:spChg chg="add mod">
-          <ac:chgData name="sruthika katipalli" userId="40ee7db3f3b20d47" providerId="LiveId" clId="{916F478F-089F-48EB-9695-5C1991CD97E9}" dt="2025-04-20T06:52:37.958" v="807" actId="1076"/>
+        <pc:spChg chg="add del mod">
+          <ac:chgData name="sruthika katipalli" userId="40ee7db3f3b20d47" providerId="LiveId" clId="{916F478F-089F-48EB-9695-5C1991CD97E9}" dt="2025-04-21T10:41:03.809" v="1011" actId="478"/>
           <ac:spMkLst>
             <pc:docMk/>
             <pc:sldMk cId="3347833306" sldId="275"/>
             <ac:spMk id="55" creationId="{D0067A3B-A1A4-BD76-A253-5FA98BDB99F5}"/>
           </ac:spMkLst>
         </pc:spChg>
-        <pc:picChg chg="add del mod">
-          <ac:chgData name="sruthika katipalli" userId="40ee7db3f3b20d47" providerId="LiveId" clId="{916F478F-089F-48EB-9695-5C1991CD97E9}" dt="2025-04-20T06:52:53.904" v="809" actId="21"/>
+        <pc:picChg chg="add mod">
+          <ac:chgData name="sruthika katipalli" userId="40ee7db3f3b20d47" providerId="LiveId" clId="{916F478F-089F-48EB-9695-5C1991CD97E9}" dt="2025-04-22T05:51:05.147" v="1064" actId="14100"/>
           <ac:picMkLst>
             <pc:docMk/>
             <pc:sldMk cId="3347833306" sldId="275"/>
-            <ac:picMk id="4" creationId="{3E2CB8A6-3FAD-AD46-E5B8-A9BCF66E1834}"/>
+            <ac:picMk id="4" creationId="{7965AFFD-83E1-6E8F-68F2-8878663CE05F}"/>
           </ac:picMkLst>
         </pc:picChg>
-        <pc:cxnChg chg="add mod">
-          <ac:chgData name="sruthika katipalli" userId="40ee7db3f3b20d47" providerId="LiveId" clId="{916F478F-089F-48EB-9695-5C1991CD97E9}" dt="2025-04-20T06:41:35.465" v="560" actId="14100"/>
+        <pc:cxnChg chg="add del mod">
+          <ac:chgData name="sruthika katipalli" userId="40ee7db3f3b20d47" providerId="LiveId" clId="{916F478F-089F-48EB-9695-5C1991CD97E9}" dt="2025-04-21T10:39:10.795" v="970" actId="478"/>
           <ac:cxnSpMkLst>
             <pc:docMk/>
             <pc:sldMk cId="3347833306" sldId="275"/>
             <ac:cxnSpMk id="16" creationId="{B025A65D-45CD-E301-70FF-C0F26ACBA6CC}"/>
           </ac:cxnSpMkLst>
         </pc:cxnChg>
-        <pc:cxnChg chg="add mod">
-          <ac:chgData name="sruthika katipalli" userId="40ee7db3f3b20d47" providerId="LiveId" clId="{916F478F-089F-48EB-9695-5C1991CD97E9}" dt="2025-04-20T06:42:35.545" v="566" actId="14100"/>
+        <pc:cxnChg chg="add del mod">
+          <ac:chgData name="sruthika katipalli" userId="40ee7db3f3b20d47" providerId="LiveId" clId="{916F478F-089F-48EB-9695-5C1991CD97E9}" dt="2025-04-21T10:39:23.160" v="974" actId="478"/>
           <ac:cxnSpMkLst>
             <pc:docMk/>
             <pc:sldMk cId="3347833306" sldId="275"/>
             <ac:cxnSpMk id="17" creationId="{9329A665-6BB6-C482-D33F-62C6BE1E3B1E}"/>
           </ac:cxnSpMkLst>
         </pc:cxnChg>
-        <pc:cxnChg chg="add mod">
-          <ac:chgData name="sruthika katipalli" userId="40ee7db3f3b20d47" providerId="LiveId" clId="{916F478F-089F-48EB-9695-5C1991CD97E9}" dt="2025-04-20T06:42:43.814" v="567" actId="14100"/>
+        <pc:cxnChg chg="add del mod">
+          <ac:chgData name="sruthika katipalli" userId="40ee7db3f3b20d47" providerId="LiveId" clId="{916F478F-089F-48EB-9695-5C1991CD97E9}" dt="2025-04-21T10:39:20.328" v="973" actId="478"/>
           <ac:cxnSpMkLst>
             <pc:docMk/>
             <pc:sldMk cId="3347833306" sldId="275"/>
             <ac:cxnSpMk id="18" creationId="{D508CD0D-2467-AA33-2F6D-57BC34079A13}"/>
           </ac:cxnSpMkLst>
         </pc:cxnChg>
-        <pc:cxnChg chg="add mod">
-          <ac:chgData name="sruthika katipalli" userId="40ee7db3f3b20d47" providerId="LiveId" clId="{916F478F-089F-48EB-9695-5C1991CD97E9}" dt="2025-04-20T06:42:51.417" v="568" actId="14100"/>
+        <pc:cxnChg chg="add del mod">
+          <ac:chgData name="sruthika katipalli" userId="40ee7db3f3b20d47" providerId="LiveId" clId="{916F478F-089F-48EB-9695-5C1991CD97E9}" dt="2025-04-21T10:39:38.340" v="980" actId="478"/>
           <ac:cxnSpMkLst>
             <pc:docMk/>
             <pc:sldMk cId="3347833306" sldId="275"/>
             <ac:cxnSpMk id="19" creationId="{6D14AAD8-27DF-4C0E-E7A8-441232D2FB7C}"/>
           </ac:cxnSpMkLst>
         </pc:cxnChg>
-        <pc:cxnChg chg="add mod">
-          <ac:chgData name="sruthika katipalli" userId="40ee7db3f3b20d47" providerId="LiveId" clId="{916F478F-089F-48EB-9695-5C1991CD97E9}" dt="2025-04-20T06:19:20.137" v="482" actId="13822"/>
+        <pc:cxnChg chg="add del mod">
+          <ac:chgData name="sruthika katipalli" userId="40ee7db3f3b20d47" providerId="LiveId" clId="{916F478F-089F-48EB-9695-5C1991CD97E9}" dt="2025-04-21T10:40:53.692" v="1009" actId="478"/>
           <ac:cxnSpMkLst>
             <pc:docMk/>
             <pc:sldMk cId="3347833306" sldId="275"/>
             <ac:cxnSpMk id="21" creationId="{BC21993D-0A05-CEAA-88CC-307BB93BE8C6}"/>
           </ac:cxnSpMkLst>
         </pc:cxnChg>
-        <pc:cxnChg chg="add mod">
-          <ac:chgData name="sruthika katipalli" userId="40ee7db3f3b20d47" providerId="LiveId" clId="{916F478F-089F-48EB-9695-5C1991CD97E9}" dt="2025-04-20T06:19:16.609" v="481" actId="13822"/>
+        <pc:cxnChg chg="add del mod">
+          <ac:chgData name="sruthika katipalli" userId="40ee7db3f3b20d47" providerId="LiveId" clId="{916F478F-089F-48EB-9695-5C1991CD97E9}" dt="2025-04-21T10:40:51.549" v="1008" actId="478"/>
           <ac:cxnSpMkLst>
             <pc:docMk/>
             <pc:sldMk cId="3347833306" sldId="275"/>
             <ac:cxnSpMk id="23" creationId="{6DBB2500-C398-9703-CFB6-BE4D3DFE4759}"/>
           </ac:cxnSpMkLst>
         </pc:cxnChg>
-        <pc:cxnChg chg="add mod">
-          <ac:chgData name="sruthika katipalli" userId="40ee7db3f3b20d47" providerId="LiveId" clId="{916F478F-089F-48EB-9695-5C1991CD97E9}" dt="2025-04-20T06:19:12.772" v="480" actId="13822"/>
+        <pc:cxnChg chg="add del mod">
+          <ac:chgData name="sruthika katipalli" userId="40ee7db3f3b20d47" providerId="LiveId" clId="{916F478F-089F-48EB-9695-5C1991CD97E9}" dt="2025-04-21T10:39:13.620" v="971" actId="478"/>
           <ac:cxnSpMkLst>
             <pc:docMk/>
             <pc:sldMk cId="3347833306" sldId="275"/>
             <ac:cxnSpMk id="25" creationId="{0D926A74-4EE1-76EE-F6CA-9A999339128B}"/>
           </ac:cxnSpMkLst>
         </pc:cxnChg>
-        <pc:cxnChg chg="add mod">
-          <ac:chgData name="sruthika katipalli" userId="40ee7db3f3b20d47" providerId="LiveId" clId="{916F478F-089F-48EB-9695-5C1991CD97E9}" dt="2025-04-20T06:44:39.411" v="580" actId="13822"/>
+        <pc:cxnChg chg="add del mod">
+          <ac:chgData name="sruthika katipalli" userId="40ee7db3f3b20d47" providerId="LiveId" clId="{916F478F-089F-48EB-9695-5C1991CD97E9}" dt="2025-04-21T10:39:52.697" v="995" actId="478"/>
           <ac:cxnSpMkLst>
             <pc:docMk/>
             <pc:sldMk cId="3347833306" sldId="275"/>
             <ac:cxnSpMk id="27" creationId="{844479AA-150C-B3CD-E0BD-EF6EF0FD616A}"/>
           </ac:cxnSpMkLst>
         </pc:cxnChg>
-        <pc:cxnChg chg="add mod">
-          <ac:chgData name="sruthika katipalli" userId="40ee7db3f3b20d47" providerId="LiveId" clId="{916F478F-089F-48EB-9695-5C1991CD97E9}" dt="2025-04-20T06:44:35.642" v="579" actId="13822"/>
+        <pc:cxnChg chg="add del mod">
+          <ac:chgData name="sruthika katipalli" userId="40ee7db3f3b20d47" providerId="LiveId" clId="{916F478F-089F-48EB-9695-5C1991CD97E9}" dt="2025-04-21T10:40:46.686" v="1006" actId="478"/>
           <ac:cxnSpMkLst>
             <pc:docMk/>
             <pc:sldMk cId="3347833306" sldId="275"/>
@@ -584,15 +544,7 @@
           </ac:cxnSpMkLst>
         </pc:cxnChg>
         <pc:cxnChg chg="add del mod">
-          <ac:chgData name="sruthika katipalli" userId="40ee7db3f3b20d47" providerId="LiveId" clId="{916F478F-089F-48EB-9695-5C1991CD97E9}" dt="2025-04-20T06:27:49.030" v="558" actId="21"/>
-          <ac:cxnSpMkLst>
-            <pc:docMk/>
-            <pc:sldMk cId="3347833306" sldId="275"/>
-            <ac:cxnSpMk id="34" creationId="{886ACBEF-1CDA-1DDF-D271-3E4FB507EBEB}"/>
-          </ac:cxnSpMkLst>
-        </pc:cxnChg>
-        <pc:cxnChg chg="add mod">
-          <ac:chgData name="sruthika katipalli" userId="40ee7db3f3b20d47" providerId="LiveId" clId="{916F478F-089F-48EB-9695-5C1991CD97E9}" dt="2025-04-20T06:44:31.527" v="578" actId="13822"/>
+          <ac:chgData name="sruthika katipalli" userId="40ee7db3f3b20d47" providerId="LiveId" clId="{916F478F-089F-48EB-9695-5C1991CD97E9}" dt="2025-04-21T10:41:17.422" v="1014" actId="478"/>
           <ac:cxnSpMkLst>
             <pc:docMk/>
             <pc:sldMk cId="3347833306" sldId="275"/>
@@ -600,15 +552,7 @@
           </ac:cxnSpMkLst>
         </pc:cxnChg>
         <pc:cxnChg chg="add del mod">
-          <ac:chgData name="sruthika katipalli" userId="40ee7db3f3b20d47" providerId="LiveId" clId="{916F478F-089F-48EB-9695-5C1991CD97E9}" dt="2025-04-20T06:44:53.536" v="581" actId="21"/>
-          <ac:cxnSpMkLst>
-            <pc:docMk/>
-            <pc:sldMk cId="3347833306" sldId="275"/>
-            <ac:cxnSpMk id="44" creationId="{BF15ECD8-C76D-2B87-CB7B-D7644B2FA99E}"/>
-          </ac:cxnSpMkLst>
-        </pc:cxnChg>
-        <pc:cxnChg chg="add mod">
-          <ac:chgData name="sruthika katipalli" userId="40ee7db3f3b20d47" providerId="LiveId" clId="{916F478F-089F-48EB-9695-5C1991CD97E9}" dt="2025-04-20T06:45:07.992" v="584" actId="13822"/>
+          <ac:chgData name="sruthika katipalli" userId="40ee7db3f3b20d47" providerId="LiveId" clId="{916F478F-089F-48EB-9695-5C1991CD97E9}" dt="2025-04-21T10:41:12.200" v="1012" actId="478"/>
           <ac:cxnSpMkLst>
             <pc:docMk/>
             <pc:sldMk cId="3347833306" sldId="275"/>
@@ -616,8 +560,8 @@
           </ac:cxnSpMkLst>
         </pc:cxnChg>
       </pc:sldChg>
-      <pc:sldChg chg="addSp modSp new mod">
-        <pc:chgData name="sruthika katipalli" userId="40ee7db3f3b20d47" providerId="LiveId" clId="{916F478F-089F-48EB-9695-5C1991CD97E9}" dt="2025-04-20T10:09:34.265" v="936" actId="14100"/>
+      <pc:sldChg chg="addSp delSp modSp new mod ord">
+        <pc:chgData name="sruthika katipalli" userId="40ee7db3f3b20d47" providerId="LiveId" clId="{916F478F-089F-48EB-9695-5C1991CD97E9}" dt="2025-04-22T04:10:52.973" v="1046" actId="14100"/>
         <pc:sldMkLst>
           <pc:docMk/>
           <pc:sldMk cId="4154467401" sldId="276"/>
@@ -630,8 +574,24 @@
             <ac:spMk id="2" creationId="{521A5EB2-FF21-33CC-78BB-66F2AF0EDA0D}"/>
           </ac:spMkLst>
         </pc:spChg>
+        <pc:graphicFrameChg chg="add del modGraphic">
+          <ac:chgData name="sruthika katipalli" userId="40ee7db3f3b20d47" providerId="LiveId" clId="{916F478F-089F-48EB-9695-5C1991CD97E9}" dt="2025-04-21T10:33:35.119" v="942" actId="21"/>
+          <ac:graphicFrameMkLst>
+            <pc:docMk/>
+            <pc:sldMk cId="4154467401" sldId="276"/>
+            <ac:graphicFrameMk id="5" creationId="{CAED3340-C37E-8935-361A-15F88808CD45}"/>
+          </ac:graphicFrameMkLst>
+        </pc:graphicFrameChg>
         <pc:picChg chg="add mod">
-          <ac:chgData name="sruthika katipalli" userId="40ee7db3f3b20d47" providerId="LiveId" clId="{916F478F-089F-48EB-9695-5C1991CD97E9}" dt="2025-04-20T10:09:34.265" v="936" actId="14100"/>
+          <ac:chgData name="sruthika katipalli" userId="40ee7db3f3b20d47" providerId="LiveId" clId="{916F478F-089F-48EB-9695-5C1991CD97E9}" dt="2025-04-22T04:10:52.973" v="1046" actId="14100"/>
+          <ac:picMkLst>
+            <pc:docMk/>
+            <pc:sldMk cId="4154467401" sldId="276"/>
+            <ac:picMk id="4" creationId="{C03CBF0E-090B-2F65-8C37-69AC8999D5CD}"/>
+          </ac:picMkLst>
+        </pc:picChg>
+        <pc:picChg chg="add del mod">
+          <ac:chgData name="sruthika katipalli" userId="40ee7db3f3b20d47" providerId="LiveId" clId="{916F478F-089F-48EB-9695-5C1991CD97E9}" dt="2025-04-21T10:41:49.205" v="1018" actId="21"/>
           <ac:picMkLst>
             <pc:docMk/>
             <pc:sldMk cId="4154467401" sldId="276"/>
@@ -639,8 +599,8 @@
           </ac:picMkLst>
         </pc:picChg>
       </pc:sldChg>
-      <pc:sldChg chg="modSp new mod">
-        <pc:chgData name="sruthika katipalli" userId="40ee7db3f3b20d47" providerId="LiveId" clId="{916F478F-089F-48EB-9695-5C1991CD97E9}" dt="2025-04-20T06:57:34.925" v="857" actId="27636"/>
+      <pc:sldChg chg="addSp delSp modSp new mod">
+        <pc:chgData name="sruthika katipalli" userId="40ee7db3f3b20d47" providerId="LiveId" clId="{916F478F-089F-48EB-9695-5C1991CD97E9}" dt="2025-04-22T05:08:13.688" v="1051" actId="14100"/>
         <pc:sldMkLst>
           <pc:docMk/>
           <pc:sldMk cId="3353824283" sldId="277"/>
@@ -653,9 +613,25 @@
             <ac:spMk id="2" creationId="{D49EADBB-AFE4-1988-0E80-B3E24C0166FD}"/>
           </ac:spMkLst>
         </pc:spChg>
+        <pc:picChg chg="add mod">
+          <ac:chgData name="sruthika katipalli" userId="40ee7db3f3b20d47" providerId="LiveId" clId="{916F478F-089F-48EB-9695-5C1991CD97E9}" dt="2025-04-22T05:08:13.688" v="1051" actId="14100"/>
+          <ac:picMkLst>
+            <pc:docMk/>
+            <pc:sldMk cId="3353824283" sldId="277"/>
+            <ac:picMk id="4" creationId="{187B34FC-09A7-6325-C68E-786BC25799F4}"/>
+          </ac:picMkLst>
+        </pc:picChg>
+        <pc:picChg chg="add del mod">
+          <ac:chgData name="sruthika katipalli" userId="40ee7db3f3b20d47" providerId="LiveId" clId="{916F478F-089F-48EB-9695-5C1991CD97E9}" dt="2025-04-21T05:32:47.399" v="938" actId="21"/>
+          <ac:picMkLst>
+            <pc:docMk/>
+            <pc:sldMk cId="3353824283" sldId="277"/>
+            <ac:picMk id="4" creationId="{88ACB35E-BEF7-AFC9-B5FE-C732982CF7CA}"/>
+          </ac:picMkLst>
+        </pc:picChg>
       </pc:sldChg>
       <pc:sldChg chg="addSp delSp modSp new mod">
-        <pc:chgData name="sruthika katipalli" userId="40ee7db3f3b20d47" providerId="LiveId" clId="{916F478F-089F-48EB-9695-5C1991CD97E9}" dt="2025-04-20T08:51:51.138" v="933" actId="14100"/>
+        <pc:chgData name="sruthika katipalli" userId="40ee7db3f3b20d47" providerId="LiveId" clId="{916F478F-089F-48EB-9695-5C1991CD97E9}" dt="2025-04-22T05:43:30.300" v="1055" actId="14100"/>
         <pc:sldMkLst>
           <pc:docMk/>
           <pc:sldMk cId="2420393502" sldId="278"/>
@@ -668,16 +644,16 @@
             <ac:spMk id="2" creationId="{C2154D2C-7EC1-7AA9-6E12-0BC1303DF4CE}"/>
           </ac:spMkLst>
         </pc:spChg>
-        <pc:picChg chg="add del mod">
-          <ac:chgData name="sruthika katipalli" userId="40ee7db3f3b20d47" providerId="LiveId" clId="{916F478F-089F-48EB-9695-5C1991CD97E9}" dt="2025-04-20T08:50:26.026" v="926" actId="21"/>
+        <pc:picChg chg="add mod">
+          <ac:chgData name="sruthika katipalli" userId="40ee7db3f3b20d47" providerId="LiveId" clId="{916F478F-089F-48EB-9695-5C1991CD97E9}" dt="2025-04-22T05:43:30.300" v="1055" actId="14100"/>
           <ac:picMkLst>
             <pc:docMk/>
             <pc:sldMk cId="2420393502" sldId="278"/>
-            <ac:picMk id="4" creationId="{A8DEE681-731C-309F-83FC-0BE671D1168C}"/>
+            <ac:picMk id="4" creationId="{603D29C3-7B3A-5B11-9D5B-153CD2FA451E}"/>
           </ac:picMkLst>
         </pc:picChg>
-        <pc:picChg chg="add mod">
-          <ac:chgData name="sruthika katipalli" userId="40ee7db3f3b20d47" providerId="LiveId" clId="{916F478F-089F-48EB-9695-5C1991CD97E9}" dt="2025-04-20T08:51:51.138" v="933" actId="14100"/>
+        <pc:picChg chg="add del mod">
+          <ac:chgData name="sruthika katipalli" userId="40ee7db3f3b20d47" providerId="LiveId" clId="{916F478F-089F-48EB-9695-5C1991CD97E9}" dt="2025-04-21T10:41:54.674" v="1019" actId="21"/>
           <ac:picMkLst>
             <pc:docMk/>
             <pc:sldMk cId="2420393502" sldId="278"/>
@@ -685,20 +661,28 @@
           </ac:picMkLst>
         </pc:picChg>
       </pc:sldChg>
-      <pc:sldChg chg="modSp new mod">
-        <pc:chgData name="sruthika katipalli" userId="40ee7db3f3b20d47" providerId="LiveId" clId="{916F478F-089F-48EB-9695-5C1991CD97E9}" dt="2025-04-20T06:59:39.307" v="924" actId="20577"/>
+      <pc:sldChg chg="addSp modSp new mod">
+        <pc:chgData name="sruthika katipalli" userId="40ee7db3f3b20d47" providerId="LiveId" clId="{916F478F-089F-48EB-9695-5C1991CD97E9}" dt="2025-04-22T05:50:13.910" v="1061" actId="14100"/>
         <pc:sldMkLst>
           <pc:docMk/>
           <pc:sldMk cId="3045030459" sldId="279"/>
         </pc:sldMkLst>
         <pc:spChg chg="mod">
-          <ac:chgData name="sruthika katipalli" userId="40ee7db3f3b20d47" providerId="LiveId" clId="{916F478F-089F-48EB-9695-5C1991CD97E9}" dt="2025-04-20T06:59:39.307" v="924" actId="20577"/>
+          <ac:chgData name="sruthika katipalli" userId="40ee7db3f3b20d47" providerId="LiveId" clId="{916F478F-089F-48EB-9695-5C1991CD97E9}" dt="2025-04-22T04:25:29.303" v="1048" actId="20577"/>
           <ac:spMkLst>
             <pc:docMk/>
             <pc:sldMk cId="3045030459" sldId="279"/>
             <ac:spMk id="2" creationId="{3137AEA6-2BA2-4CE3-619C-AEFD13CC1D5D}"/>
           </ac:spMkLst>
         </pc:spChg>
+        <pc:picChg chg="add mod">
+          <ac:chgData name="sruthika katipalli" userId="40ee7db3f3b20d47" providerId="LiveId" clId="{916F478F-089F-48EB-9695-5C1991CD97E9}" dt="2025-04-22T05:50:13.910" v="1061" actId="14100"/>
+          <ac:picMkLst>
+            <pc:docMk/>
+            <pc:sldMk cId="3045030459" sldId="279"/>
+            <ac:picMk id="4" creationId="{B8F0CBBF-490D-57CC-3DD7-56B0241BF1CF}"/>
+          </ac:picMkLst>
+        </pc:picChg>
       </pc:sldChg>
     </pc:docChg>
   </pc:docChgLst>
@@ -834,7 +818,7 @@
           <a:p>
             <a:fld id="{B7505682-797F-44FC-A382-8B6C2659ED26}" type="datetimeFigureOut">
               <a:rPr lang="en-US" smtClean="0"/>
-              <a:t>4/20/2025</a:t>
+              <a:t>4/22/2025</a:t>
             </a:fld>
             <a:endParaRPr lang="en-US"/>
           </a:p>
@@ -1002,7 +986,7 @@
           <a:p>
             <a:fld id="{B7505682-797F-44FC-A382-8B6C2659ED26}" type="datetimeFigureOut">
               <a:rPr lang="en-US" smtClean="0"/>
-              <a:t>4/20/2025</a:t>
+              <a:t>4/22/2025</a:t>
             </a:fld>
             <a:endParaRPr lang="en-US"/>
           </a:p>
@@ -1180,7 +1164,7 @@
           <a:p>
             <a:fld id="{B7505682-797F-44FC-A382-8B6C2659ED26}" type="datetimeFigureOut">
               <a:rPr lang="en-US" smtClean="0"/>
-              <a:t>4/20/2025</a:t>
+              <a:t>4/22/2025</a:t>
             </a:fld>
             <a:endParaRPr lang="en-US"/>
           </a:p>
@@ -1348,7 +1332,7 @@
           <a:p>
             <a:fld id="{B7505682-797F-44FC-A382-8B6C2659ED26}" type="datetimeFigureOut">
               <a:rPr lang="en-US" smtClean="0"/>
-              <a:t>4/20/2025</a:t>
+              <a:t>4/22/2025</a:t>
             </a:fld>
             <a:endParaRPr lang="en-US"/>
           </a:p>
@@ -1593,7 +1577,7 @@
           <a:p>
             <a:fld id="{B7505682-797F-44FC-A382-8B6C2659ED26}" type="datetimeFigureOut">
               <a:rPr lang="en-US" smtClean="0"/>
-              <a:t>4/20/2025</a:t>
+              <a:t>4/22/2025</a:t>
             </a:fld>
             <a:endParaRPr lang="en-US"/>
           </a:p>
@@ -1822,7 +1806,7 @@
           <a:p>
             <a:fld id="{B7505682-797F-44FC-A382-8B6C2659ED26}" type="datetimeFigureOut">
               <a:rPr lang="en-US" smtClean="0"/>
-              <a:t>4/20/2025</a:t>
+              <a:t>4/22/2025</a:t>
             </a:fld>
             <a:endParaRPr lang="en-US"/>
           </a:p>
@@ -2186,7 +2170,7 @@
           <a:p>
             <a:fld id="{B7505682-797F-44FC-A382-8B6C2659ED26}" type="datetimeFigureOut">
               <a:rPr lang="en-US" smtClean="0"/>
-              <a:t>4/20/2025</a:t>
+              <a:t>4/22/2025</a:t>
             </a:fld>
             <a:endParaRPr lang="en-US"/>
           </a:p>
@@ -2303,7 +2287,7 @@
           <a:p>
             <a:fld id="{B7505682-797F-44FC-A382-8B6C2659ED26}" type="datetimeFigureOut">
               <a:rPr lang="en-US" smtClean="0"/>
-              <a:t>4/20/2025</a:t>
+              <a:t>4/22/2025</a:t>
             </a:fld>
             <a:endParaRPr lang="en-US"/>
           </a:p>
@@ -2398,7 +2382,7 @@
           <a:p>
             <a:fld id="{B7505682-797F-44FC-A382-8B6C2659ED26}" type="datetimeFigureOut">
               <a:rPr lang="en-US" smtClean="0"/>
-              <a:t>4/20/2025</a:t>
+              <a:t>4/22/2025</a:t>
             </a:fld>
             <a:endParaRPr lang="en-US"/>
           </a:p>
@@ -2673,7 +2657,7 @@
           <a:p>
             <a:fld id="{B7505682-797F-44FC-A382-8B6C2659ED26}" type="datetimeFigureOut">
               <a:rPr lang="en-US" smtClean="0"/>
-              <a:t>4/20/2025</a:t>
+              <a:t>4/22/2025</a:t>
             </a:fld>
             <a:endParaRPr lang="en-US"/>
           </a:p>
@@ -2925,7 +2909,7 @@
           <a:p>
             <a:fld id="{B7505682-797F-44FC-A382-8B6C2659ED26}" type="datetimeFigureOut">
               <a:rPr lang="en-US" smtClean="0"/>
-              <a:t>4/20/2025</a:t>
+              <a:t>4/22/2025</a:t>
             </a:fld>
             <a:endParaRPr lang="en-US"/>
           </a:p>
@@ -3136,7 +3120,7 @@
           <a:p>
             <a:fld id="{B7505682-797F-44FC-A382-8B6C2659ED26}" type="datetimeFigureOut">
               <a:rPr lang="en-US" smtClean="0"/>
-              <a:t>4/20/2025</a:t>
+              <a:t>4/22/2025</a:t>
             </a:fld>
             <a:endParaRPr lang="en-US"/>
           </a:p>
@@ -3879,10 +3863,10 @@
       </p:sp>
       <p:pic>
         <p:nvPicPr>
-          <p:cNvPr id="6" name="Picture 5">
+          <p:cNvPr id="4" name="Picture 3">
             <a:extLst>
               <a:ext uri="{FF2B5EF4-FFF2-40B4-BE49-F238E27FC236}">
-                <a16:creationId xmlns:a16="http://schemas.microsoft.com/office/drawing/2014/main" id="{96524272-2CD6-E7D0-8F8C-C07C621FF956}"/>
+                <a16:creationId xmlns:a16="http://schemas.microsoft.com/office/drawing/2014/main" id="{603D29C3-7B3A-5B11-9D5B-153CD2FA451E}"/>
               </a:ext>
             </a:extLst>
           </p:cNvPr>
@@ -3905,8 +3889,8 @@
         </p:blipFill>
         <p:spPr>
           <a:xfrm>
-            <a:off x="2208974" y="1156996"/>
-            <a:ext cx="7774051" cy="5215811"/>
+            <a:off x="2034073" y="886408"/>
+            <a:ext cx="7885569" cy="5691674"/>
           </a:xfrm>
           <a:prstGeom prst="rect">
             <a:avLst/>
@@ -3972,22 +3956,51 @@
           <a:lstStyle/>
           <a:p>
             <a:r>
-              <a:rPr lang="en-IN" sz="3200" dirty="0" err="1">
-                <a:latin typeface="Times New Roman" panose="02020603050405020304" pitchFamily="18" charset="0"/>
-                <a:cs typeface="Times New Roman" panose="02020603050405020304" pitchFamily="18" charset="0"/>
-              </a:rPr>
-              <a:t>Deployement</a:t>
-            </a:r>
-            <a:r>
               <a:rPr lang="en-IN" sz="3200" dirty="0">
                 <a:latin typeface="Times New Roman" panose="02020603050405020304" pitchFamily="18" charset="0"/>
                 <a:cs typeface="Times New Roman" panose="02020603050405020304" pitchFamily="18" charset="0"/>
               </a:rPr>
-              <a:t> Diagram</a:t>
-            </a:r>
-          </a:p>
-        </p:txBody>
-      </p:sp>
+              <a:t>Deployment Diagram</a:t>
+            </a:r>
+          </a:p>
+        </p:txBody>
+      </p:sp>
+      <p:pic>
+        <p:nvPicPr>
+          <p:cNvPr id="4" name="Picture 3">
+            <a:extLst>
+              <a:ext uri="{FF2B5EF4-FFF2-40B4-BE49-F238E27FC236}">
+                <a16:creationId xmlns:a16="http://schemas.microsoft.com/office/drawing/2014/main" id="{B8F0CBBF-490D-57CC-3DD7-56B0241BF1CF}"/>
+              </a:ext>
+            </a:extLst>
+          </p:cNvPr>
+          <p:cNvPicPr>
+            <a:picLocks noChangeAspect="1"/>
+          </p:cNvPicPr>
+          <p:nvPr/>
+        </p:nvPicPr>
+        <p:blipFill>
+          <a:blip r:embed="rId2">
+            <a:extLst>
+              <a:ext uri="{28A0092B-C50C-407E-A947-70E740481C1C}">
+                <a14:useLocalDpi xmlns:a14="http://schemas.microsoft.com/office/drawing/2010/main" val="0"/>
+              </a:ext>
+            </a:extLst>
+          </a:blip>
+          <a:stretch>
+            <a:fillRect/>
+          </a:stretch>
+        </p:blipFill>
+        <p:spPr>
+          <a:xfrm>
+            <a:off x="2361067" y="877078"/>
+            <a:ext cx="7469866" cy="5617028"/>
+          </a:xfrm>
+          <a:prstGeom prst="rect">
+            <a:avLst/>
+          </a:prstGeom>
+        </p:spPr>
+      </p:pic>
     </p:spTree>
     <p:extLst>
       <p:ext uri="{BB962C8B-B14F-4D97-AF65-F5344CB8AC3E}">
@@ -5936,6 +5949,42 @@
           </a:p>
         </p:txBody>
       </p:sp>
+      <p:pic>
+        <p:nvPicPr>
+          <p:cNvPr id="4" name="Picture 3">
+            <a:extLst>
+              <a:ext uri="{FF2B5EF4-FFF2-40B4-BE49-F238E27FC236}">
+                <a16:creationId xmlns:a16="http://schemas.microsoft.com/office/drawing/2014/main" id="{8087009E-2209-A6B8-C08A-6E3493A5A688}"/>
+              </a:ext>
+            </a:extLst>
+          </p:cNvPr>
+          <p:cNvPicPr>
+            <a:picLocks noChangeAspect="1"/>
+          </p:cNvPicPr>
+          <p:nvPr/>
+        </p:nvPicPr>
+        <p:blipFill>
+          <a:blip r:embed="rId2">
+            <a:extLst>
+              <a:ext uri="{28A0092B-C50C-407E-A947-70E740481C1C}">
+                <a14:useLocalDpi xmlns:a14="http://schemas.microsoft.com/office/drawing/2010/main" val="0"/>
+              </a:ext>
+            </a:extLst>
+          </a:blip>
+          <a:stretch>
+            <a:fillRect/>
+          </a:stretch>
+        </p:blipFill>
+        <p:spPr>
+          <a:xfrm>
+            <a:off x="2167842" y="1024157"/>
+            <a:ext cx="8203075" cy="5468717"/>
+          </a:xfrm>
+          <a:prstGeom prst="rect">
+            <a:avLst/>
+          </a:prstGeom>
+        </p:spPr>
+      </p:pic>
     </p:spTree>
     <p:extLst>
       <p:ext uri="{BB962C8B-B14F-4D97-AF65-F5344CB8AC3E}">
@@ -6004,713 +6053,42 @@
           </a:p>
         </p:txBody>
       </p:sp>
-      <p:sp>
-        <p:nvSpPr>
-          <p:cNvPr id="5" name="Oval 4">
+      <p:pic>
+        <p:nvPicPr>
+          <p:cNvPr id="4" name="Picture 3">
             <a:extLst>
               <a:ext uri="{FF2B5EF4-FFF2-40B4-BE49-F238E27FC236}">
-                <a16:creationId xmlns:a16="http://schemas.microsoft.com/office/drawing/2014/main" id="{E723D808-9784-CE8E-774B-DA3124A45650}"/>
+                <a16:creationId xmlns:a16="http://schemas.microsoft.com/office/drawing/2014/main" id="{168FD908-FD1E-D379-AA76-1186A3978EBF}"/>
               </a:ext>
             </a:extLst>
           </p:cNvPr>
-          <p:cNvSpPr/>
+          <p:cNvPicPr>
+            <a:picLocks noChangeAspect="1"/>
+          </p:cNvPicPr>
           <p:nvPr/>
-        </p:nvSpPr>
+        </p:nvPicPr>
+        <p:blipFill>
+          <a:blip r:embed="rId2">
+            <a:extLst>
+              <a:ext uri="{28A0092B-C50C-407E-A947-70E740481C1C}">
+                <a14:useLocalDpi xmlns:a14="http://schemas.microsoft.com/office/drawing/2010/main" val="0"/>
+              </a:ext>
+            </a:extLst>
+          </a:blip>
+          <a:stretch>
+            <a:fillRect/>
+          </a:stretch>
+        </p:blipFill>
         <p:spPr>
           <a:xfrm>
-            <a:off x="6484776" y="1156996"/>
-            <a:ext cx="2230016" cy="521282"/>
-          </a:xfrm>
-          <a:prstGeom prst="ellipse">
-            <a:avLst/>
-          </a:prstGeom>
-        </p:spPr>
-        <p:style>
-          <a:lnRef idx="2">
-            <a:schemeClr val="accent6"/>
-          </a:lnRef>
-          <a:fillRef idx="1">
-            <a:schemeClr val="lt1"/>
-          </a:fillRef>
-          <a:effectRef idx="0">
-            <a:schemeClr val="accent6"/>
-          </a:effectRef>
-          <a:fontRef idx="minor">
-            <a:schemeClr val="dk1"/>
-          </a:fontRef>
-        </p:style>
-        <p:txBody>
-          <a:bodyPr rtlCol="0" anchor="ctr"/>
-          <a:lstStyle/>
-          <a:p>
-            <a:pPr algn="ctr"/>
-            <a:r>
-              <a:rPr lang="en-IN" dirty="0"/>
-              <a:t>Upload Dataset</a:t>
-            </a:r>
-          </a:p>
-        </p:txBody>
-      </p:sp>
-      <p:sp>
-        <p:nvSpPr>
-          <p:cNvPr id="8" name="Oval 7">
-            <a:extLst>
-              <a:ext uri="{FF2B5EF4-FFF2-40B4-BE49-F238E27FC236}">
-                <a16:creationId xmlns:a16="http://schemas.microsoft.com/office/drawing/2014/main" id="{B13C9764-8664-4A8D-EAA6-B34C23E2E468}"/>
-              </a:ext>
-            </a:extLst>
-          </p:cNvPr>
-          <p:cNvSpPr/>
-          <p:nvPr/>
-        </p:nvSpPr>
-        <p:spPr>
-          <a:xfrm>
-            <a:off x="6484776" y="1931437"/>
-            <a:ext cx="2394857" cy="690465"/>
-          </a:xfrm>
-          <a:prstGeom prst="ellipse">
-            <a:avLst/>
-          </a:prstGeom>
-        </p:spPr>
-        <p:style>
-          <a:lnRef idx="2">
-            <a:schemeClr val="accent6"/>
-          </a:lnRef>
-          <a:fillRef idx="1">
-            <a:schemeClr val="lt1"/>
-          </a:fillRef>
-          <a:effectRef idx="0">
-            <a:schemeClr val="accent6"/>
-          </a:effectRef>
-          <a:fontRef idx="minor">
-            <a:schemeClr val="dk1"/>
-          </a:fontRef>
-        </p:style>
-        <p:txBody>
-          <a:bodyPr rtlCol="0" anchor="ctr"/>
-          <a:lstStyle/>
-          <a:p>
-            <a:pPr algn="ctr"/>
-            <a:r>
-              <a:rPr lang="en-IN" dirty="0"/>
-              <a:t>Perform Data Preprocessing</a:t>
-            </a:r>
-          </a:p>
-        </p:txBody>
-      </p:sp>
-      <p:sp>
-        <p:nvSpPr>
-          <p:cNvPr id="9" name="Oval 8">
-            <a:extLst>
-              <a:ext uri="{FF2B5EF4-FFF2-40B4-BE49-F238E27FC236}">
-                <a16:creationId xmlns:a16="http://schemas.microsoft.com/office/drawing/2014/main" id="{179A8C26-576B-9775-F662-0B42D63532BA}"/>
-              </a:ext>
-            </a:extLst>
-          </p:cNvPr>
-          <p:cNvSpPr/>
-          <p:nvPr/>
-        </p:nvSpPr>
-        <p:spPr>
-          <a:xfrm>
-            <a:off x="6584302" y="2816613"/>
-            <a:ext cx="2304661" cy="623920"/>
-          </a:xfrm>
-          <a:prstGeom prst="ellipse">
-            <a:avLst/>
-          </a:prstGeom>
-        </p:spPr>
-        <p:style>
-          <a:lnRef idx="2">
-            <a:schemeClr val="accent6"/>
-          </a:lnRef>
-          <a:fillRef idx="1">
-            <a:schemeClr val="lt1"/>
-          </a:fillRef>
-          <a:effectRef idx="0">
-            <a:schemeClr val="accent6"/>
-          </a:effectRef>
-          <a:fontRef idx="minor">
-            <a:schemeClr val="dk1"/>
-          </a:fontRef>
-        </p:style>
-        <p:txBody>
-          <a:bodyPr rtlCol="0" anchor="ctr"/>
-          <a:lstStyle/>
-          <a:p>
-            <a:pPr algn="ctr"/>
-            <a:r>
-              <a:rPr lang="en-IN" dirty="0"/>
-              <a:t>Perform Data Ingestion</a:t>
-            </a:r>
-          </a:p>
-        </p:txBody>
-      </p:sp>
-      <p:sp>
-        <p:nvSpPr>
-          <p:cNvPr id="10" name="Oval 9">
-            <a:extLst>
-              <a:ext uri="{FF2B5EF4-FFF2-40B4-BE49-F238E27FC236}">
-                <a16:creationId xmlns:a16="http://schemas.microsoft.com/office/drawing/2014/main" id="{A1AB5E45-074B-5F0B-7FEE-E1178DEC4B2E}"/>
-              </a:ext>
-            </a:extLst>
-          </p:cNvPr>
-          <p:cNvSpPr/>
-          <p:nvPr/>
-        </p:nvSpPr>
-        <p:spPr>
-          <a:xfrm>
-            <a:off x="6584302" y="3701789"/>
-            <a:ext cx="2304661" cy="1159460"/>
-          </a:xfrm>
-          <a:prstGeom prst="ellipse">
-            <a:avLst/>
-          </a:prstGeom>
-        </p:spPr>
-        <p:style>
-          <a:lnRef idx="2">
-            <a:schemeClr val="accent6"/>
-          </a:lnRef>
-          <a:fillRef idx="1">
-            <a:schemeClr val="lt1"/>
-          </a:fillRef>
-          <a:effectRef idx="0">
-            <a:schemeClr val="accent6"/>
-          </a:effectRef>
-          <a:fontRef idx="minor">
-            <a:schemeClr val="dk1"/>
-          </a:fontRef>
-        </p:style>
-        <p:txBody>
-          <a:bodyPr rtlCol="0" anchor="ctr"/>
-          <a:lstStyle/>
-          <a:p>
-            <a:pPr algn="ctr"/>
-            <a:r>
-              <a:rPr lang="en-IN" dirty="0"/>
-              <a:t>Run Model Selection</a:t>
-            </a:r>
-          </a:p>
-          <a:p>
-            <a:pPr algn="ctr"/>
-            <a:r>
-              <a:rPr lang="en-IN" dirty="0"/>
-              <a:t>(Classification/Regression</a:t>
-            </a:r>
-          </a:p>
-        </p:txBody>
-      </p:sp>
-      <p:sp>
-        <p:nvSpPr>
-          <p:cNvPr id="11" name="Oval 10">
-            <a:extLst>
-              <a:ext uri="{FF2B5EF4-FFF2-40B4-BE49-F238E27FC236}">
-                <a16:creationId xmlns:a16="http://schemas.microsoft.com/office/drawing/2014/main" id="{3D43B074-34B3-BEFE-6AA0-DE0272C1DC23}"/>
-              </a:ext>
-            </a:extLst>
-          </p:cNvPr>
-          <p:cNvSpPr/>
-          <p:nvPr/>
-        </p:nvSpPr>
-        <p:spPr>
-          <a:xfrm>
-            <a:off x="6711819" y="5047862"/>
-            <a:ext cx="2167813" cy="522514"/>
-          </a:xfrm>
-          <a:prstGeom prst="ellipse">
-            <a:avLst/>
-          </a:prstGeom>
-        </p:spPr>
-        <p:style>
-          <a:lnRef idx="2">
-            <a:schemeClr val="accent6"/>
-          </a:lnRef>
-          <a:fillRef idx="1">
-            <a:schemeClr val="lt1"/>
-          </a:fillRef>
-          <a:effectRef idx="0">
-            <a:schemeClr val="accent6"/>
-          </a:effectRef>
-          <a:fontRef idx="minor">
-            <a:schemeClr val="dk1"/>
-          </a:fontRef>
-        </p:style>
-        <p:txBody>
-          <a:bodyPr rtlCol="0" anchor="ctr"/>
-          <a:lstStyle/>
-          <a:p>
-            <a:pPr algn="ctr"/>
-            <a:r>
-              <a:rPr lang="en-IN" dirty="0"/>
-              <a:t>Perform Clustering</a:t>
-            </a:r>
-          </a:p>
-        </p:txBody>
-      </p:sp>
-      <p:sp>
-        <p:nvSpPr>
-          <p:cNvPr id="12" name="Oval 11">
-            <a:extLst>
-              <a:ext uri="{FF2B5EF4-FFF2-40B4-BE49-F238E27FC236}">
-                <a16:creationId xmlns:a16="http://schemas.microsoft.com/office/drawing/2014/main" id="{BEEEA9D5-D532-F5B8-8F7F-422BA735B6D1}"/>
-              </a:ext>
-            </a:extLst>
-          </p:cNvPr>
-          <p:cNvSpPr/>
-          <p:nvPr/>
-        </p:nvSpPr>
-        <p:spPr>
-          <a:xfrm>
-            <a:off x="6923313" y="5756989"/>
-            <a:ext cx="1937657" cy="829191"/>
-          </a:xfrm>
-          <a:prstGeom prst="ellipse">
-            <a:avLst/>
-          </a:prstGeom>
-        </p:spPr>
-        <p:style>
-          <a:lnRef idx="2">
-            <a:schemeClr val="accent6"/>
-          </a:lnRef>
-          <a:fillRef idx="1">
-            <a:schemeClr val="lt1"/>
-          </a:fillRef>
-          <a:effectRef idx="0">
-            <a:schemeClr val="accent6"/>
-          </a:effectRef>
-          <a:fontRef idx="minor">
-            <a:schemeClr val="dk1"/>
-          </a:fontRef>
-        </p:style>
-        <p:txBody>
-          <a:bodyPr rtlCol="0" anchor="ctr"/>
-          <a:lstStyle/>
-          <a:p>
-            <a:pPr algn="ctr"/>
-            <a:r>
-              <a:rPr lang="en-IN" dirty="0"/>
-              <a:t>Download Processed Data</a:t>
-            </a:r>
-          </a:p>
-        </p:txBody>
-      </p:sp>
-      <p:sp>
-        <p:nvSpPr>
-          <p:cNvPr id="13" name="Flowchart: Connector 12">
-            <a:extLst>
-              <a:ext uri="{FF2B5EF4-FFF2-40B4-BE49-F238E27FC236}">
-                <a16:creationId xmlns:a16="http://schemas.microsoft.com/office/drawing/2014/main" id="{EAE39023-DF6B-00B7-C070-55812BB1BC31}"/>
-              </a:ext>
-            </a:extLst>
-          </p:cNvPr>
-          <p:cNvSpPr/>
-          <p:nvPr/>
-        </p:nvSpPr>
-        <p:spPr>
-          <a:xfrm>
-            <a:off x="3013789" y="2669787"/>
-            <a:ext cx="569166" cy="521282"/>
-          </a:xfrm>
-          <a:prstGeom prst="flowChartConnector">
-            <a:avLst/>
-          </a:prstGeom>
-        </p:spPr>
-        <p:style>
-          <a:lnRef idx="2">
-            <a:schemeClr val="accent6"/>
-          </a:lnRef>
-          <a:fillRef idx="1">
-            <a:schemeClr val="lt1"/>
-          </a:fillRef>
-          <a:effectRef idx="0">
-            <a:schemeClr val="accent6"/>
-          </a:effectRef>
-          <a:fontRef idx="minor">
-            <a:schemeClr val="dk1"/>
-          </a:fontRef>
-        </p:style>
-        <p:txBody>
-          <a:bodyPr rtlCol="0" anchor="ctr"/>
-          <a:lstStyle/>
-          <a:p>
-            <a:pPr algn="ctr"/>
-            <a:endParaRPr lang="en-IN"/>
-          </a:p>
-        </p:txBody>
-      </p:sp>
-      <p:cxnSp>
-        <p:nvCxnSpPr>
-          <p:cNvPr id="15" name="Straight Connector 14">
-            <a:extLst>
-              <a:ext uri="{FF2B5EF4-FFF2-40B4-BE49-F238E27FC236}">
-                <a16:creationId xmlns:a16="http://schemas.microsoft.com/office/drawing/2014/main" id="{14E0C42B-F9C1-62E1-5D2A-CC41F8D3572A}"/>
-              </a:ext>
-            </a:extLst>
-          </p:cNvPr>
-          <p:cNvCxnSpPr>
-            <a:cxnSpLocks/>
-            <a:stCxn id="13" idx="4"/>
-          </p:cNvCxnSpPr>
-          <p:nvPr/>
-        </p:nvCxnSpPr>
-        <p:spPr>
-          <a:xfrm>
-            <a:off x="3298372" y="3191069"/>
-            <a:ext cx="0" cy="623920"/>
-          </a:xfrm>
-          <a:prstGeom prst="line">
-            <a:avLst/>
-          </a:prstGeom>
-        </p:spPr>
-        <p:style>
-          <a:lnRef idx="1">
-            <a:schemeClr val="dk1"/>
-          </a:lnRef>
-          <a:fillRef idx="0">
-            <a:schemeClr val="dk1"/>
-          </a:fillRef>
-          <a:effectRef idx="0">
-            <a:schemeClr val="dk1"/>
-          </a:effectRef>
-          <a:fontRef idx="minor">
-            <a:schemeClr val="tx1"/>
-          </a:fontRef>
-        </p:style>
-      </p:cxnSp>
-      <p:cxnSp>
-        <p:nvCxnSpPr>
-          <p:cNvPr id="18" name="Straight Connector 17">
-            <a:extLst>
-              <a:ext uri="{FF2B5EF4-FFF2-40B4-BE49-F238E27FC236}">
-                <a16:creationId xmlns:a16="http://schemas.microsoft.com/office/drawing/2014/main" id="{C282C345-E2AA-1D9D-1CC3-57E67CC6713B}"/>
-              </a:ext>
-            </a:extLst>
-          </p:cNvPr>
-          <p:cNvCxnSpPr/>
-          <p:nvPr/>
-        </p:nvCxnSpPr>
-        <p:spPr>
-          <a:xfrm flipH="1">
-            <a:off x="3013789" y="3814989"/>
-            <a:ext cx="284583" cy="439770"/>
-          </a:xfrm>
-          <a:prstGeom prst="line">
-            <a:avLst/>
-          </a:prstGeom>
-        </p:spPr>
-        <p:style>
-          <a:lnRef idx="1">
-            <a:schemeClr val="dk1"/>
-          </a:lnRef>
-          <a:fillRef idx="0">
-            <a:schemeClr val="dk1"/>
-          </a:fillRef>
-          <a:effectRef idx="0">
-            <a:schemeClr val="dk1"/>
-          </a:effectRef>
-          <a:fontRef idx="minor">
-            <a:schemeClr val="tx1"/>
-          </a:fontRef>
-        </p:style>
-      </p:cxnSp>
-      <p:cxnSp>
-        <p:nvCxnSpPr>
-          <p:cNvPr id="20" name="Straight Connector 19">
-            <a:extLst>
-              <a:ext uri="{FF2B5EF4-FFF2-40B4-BE49-F238E27FC236}">
-                <a16:creationId xmlns:a16="http://schemas.microsoft.com/office/drawing/2014/main" id="{BE699155-8AEA-808A-D550-8C0276D94BF6}"/>
-              </a:ext>
-            </a:extLst>
-          </p:cNvPr>
-          <p:cNvCxnSpPr/>
-          <p:nvPr/>
-        </p:nvCxnSpPr>
-        <p:spPr>
-          <a:xfrm>
-            <a:off x="3298372" y="3814989"/>
-            <a:ext cx="284583" cy="439770"/>
-          </a:xfrm>
-          <a:prstGeom prst="line">
-            <a:avLst/>
-          </a:prstGeom>
-        </p:spPr>
-        <p:style>
-          <a:lnRef idx="1">
-            <a:schemeClr val="dk1"/>
-          </a:lnRef>
-          <a:fillRef idx="0">
-            <a:schemeClr val="dk1"/>
-          </a:fillRef>
-          <a:effectRef idx="0">
-            <a:schemeClr val="dk1"/>
-          </a:effectRef>
-          <a:fontRef idx="minor">
-            <a:schemeClr val="tx1"/>
-          </a:fontRef>
-        </p:style>
-      </p:cxnSp>
-      <p:cxnSp>
-        <p:nvCxnSpPr>
-          <p:cNvPr id="22" name="Straight Connector 21">
-            <a:extLst>
-              <a:ext uri="{FF2B5EF4-FFF2-40B4-BE49-F238E27FC236}">
-                <a16:creationId xmlns:a16="http://schemas.microsoft.com/office/drawing/2014/main" id="{D96C8BEF-20F2-0A8E-CCF2-686BA95F8F91}"/>
-              </a:ext>
-            </a:extLst>
-          </p:cNvPr>
-          <p:cNvCxnSpPr>
-            <a:cxnSpLocks/>
-          </p:cNvCxnSpPr>
-          <p:nvPr/>
-        </p:nvCxnSpPr>
-        <p:spPr>
-          <a:xfrm>
-            <a:off x="2883159" y="3536302"/>
-            <a:ext cx="793102" cy="0"/>
-          </a:xfrm>
-          <a:prstGeom prst="line">
-            <a:avLst/>
-          </a:prstGeom>
-        </p:spPr>
-        <p:style>
-          <a:lnRef idx="1">
-            <a:schemeClr val="dk1"/>
-          </a:lnRef>
-          <a:fillRef idx="0">
-            <a:schemeClr val="dk1"/>
-          </a:fillRef>
-          <a:effectRef idx="0">
-            <a:schemeClr val="dk1"/>
-          </a:effectRef>
-          <a:fontRef idx="minor">
-            <a:schemeClr val="tx1"/>
-          </a:fontRef>
-        </p:style>
-      </p:cxnSp>
-      <p:sp>
-        <p:nvSpPr>
-          <p:cNvPr id="26" name="TextBox 25">
-            <a:extLst>
-              <a:ext uri="{FF2B5EF4-FFF2-40B4-BE49-F238E27FC236}">
-                <a16:creationId xmlns:a16="http://schemas.microsoft.com/office/drawing/2014/main" id="{EC41FCD0-46B9-8669-6E15-42ECDC51653C}"/>
-              </a:ext>
-            </a:extLst>
-          </p:cNvPr>
-          <p:cNvSpPr txBox="1"/>
-          <p:nvPr/>
-        </p:nvSpPr>
-        <p:spPr>
-          <a:xfrm>
-            <a:off x="3013789" y="4646646"/>
-            <a:ext cx="662472" cy="369332"/>
+            <a:off x="2947987" y="1209675"/>
+            <a:ext cx="6296025" cy="4438650"/>
           </a:xfrm>
           <a:prstGeom prst="rect">
             <a:avLst/>
           </a:prstGeom>
-          <a:noFill/>
         </p:spPr>
-        <p:txBody>
-          <a:bodyPr wrap="square" rtlCol="0">
-            <a:spAutoFit/>
-          </a:bodyPr>
-          <a:lstStyle/>
-          <a:p>
-            <a:r>
-              <a:rPr lang="en-IN" dirty="0"/>
-              <a:t>User</a:t>
-            </a:r>
-          </a:p>
-        </p:txBody>
-      </p:sp>
-      <p:cxnSp>
-        <p:nvCxnSpPr>
-          <p:cNvPr id="28" name="Straight Connector 27">
-            <a:extLst>
-              <a:ext uri="{FF2B5EF4-FFF2-40B4-BE49-F238E27FC236}">
-                <a16:creationId xmlns:a16="http://schemas.microsoft.com/office/drawing/2014/main" id="{D67F202C-AB1B-FAFC-5E71-BEE2F576E534}"/>
-              </a:ext>
-            </a:extLst>
-          </p:cNvPr>
-          <p:cNvCxnSpPr>
-            <a:cxnSpLocks/>
-          </p:cNvCxnSpPr>
-          <p:nvPr/>
-        </p:nvCxnSpPr>
-        <p:spPr>
-          <a:xfrm flipV="1">
-            <a:off x="3676261" y="1520890"/>
-            <a:ext cx="2696547" cy="1418253"/>
-          </a:xfrm>
-          <a:prstGeom prst="line">
-            <a:avLst/>
-          </a:prstGeom>
-        </p:spPr>
-        <p:style>
-          <a:lnRef idx="1">
-            <a:schemeClr val="dk1"/>
-          </a:lnRef>
-          <a:fillRef idx="0">
-            <a:schemeClr val="dk1"/>
-          </a:fillRef>
-          <a:effectRef idx="0">
-            <a:schemeClr val="dk1"/>
-          </a:effectRef>
-          <a:fontRef idx="minor">
-            <a:schemeClr val="tx1"/>
-          </a:fontRef>
-        </p:style>
-      </p:cxnSp>
-      <p:cxnSp>
-        <p:nvCxnSpPr>
-          <p:cNvPr id="31" name="Straight Connector 30">
-            <a:extLst>
-              <a:ext uri="{FF2B5EF4-FFF2-40B4-BE49-F238E27FC236}">
-                <a16:creationId xmlns:a16="http://schemas.microsoft.com/office/drawing/2014/main" id="{63A7FE14-34FC-8794-9670-66D5C863986D}"/>
-              </a:ext>
-            </a:extLst>
-          </p:cNvPr>
-          <p:cNvCxnSpPr>
-            <a:cxnSpLocks/>
-          </p:cNvCxnSpPr>
-          <p:nvPr/>
-        </p:nvCxnSpPr>
-        <p:spPr>
-          <a:xfrm flipV="1">
-            <a:off x="3778898" y="2267339"/>
-            <a:ext cx="2593910" cy="671804"/>
-          </a:xfrm>
-          <a:prstGeom prst="line">
-            <a:avLst/>
-          </a:prstGeom>
-        </p:spPr>
-        <p:style>
-          <a:lnRef idx="1">
-            <a:schemeClr val="dk1"/>
-          </a:lnRef>
-          <a:fillRef idx="0">
-            <a:schemeClr val="dk1"/>
-          </a:fillRef>
-          <a:effectRef idx="0">
-            <a:schemeClr val="dk1"/>
-          </a:effectRef>
-          <a:fontRef idx="minor">
-            <a:schemeClr val="tx1"/>
-          </a:fontRef>
-        </p:style>
-      </p:cxnSp>
-      <p:cxnSp>
-        <p:nvCxnSpPr>
-          <p:cNvPr id="34" name="Straight Connector 33">
-            <a:extLst>
-              <a:ext uri="{FF2B5EF4-FFF2-40B4-BE49-F238E27FC236}">
-                <a16:creationId xmlns:a16="http://schemas.microsoft.com/office/drawing/2014/main" id="{4B0CE014-C0C0-4757-4258-A1A21FE6006D}"/>
-              </a:ext>
-            </a:extLst>
-          </p:cNvPr>
-          <p:cNvCxnSpPr>
-            <a:cxnSpLocks/>
-          </p:cNvCxnSpPr>
-          <p:nvPr/>
-        </p:nvCxnSpPr>
-        <p:spPr>
-          <a:xfrm>
-            <a:off x="3778898" y="3060441"/>
-            <a:ext cx="2593910" cy="1"/>
-          </a:xfrm>
-          <a:prstGeom prst="line">
-            <a:avLst/>
-          </a:prstGeom>
-        </p:spPr>
-        <p:style>
-          <a:lnRef idx="1">
-            <a:schemeClr val="dk1"/>
-          </a:lnRef>
-          <a:fillRef idx="0">
-            <a:schemeClr val="dk1"/>
-          </a:fillRef>
-          <a:effectRef idx="0">
-            <a:schemeClr val="dk1"/>
-          </a:effectRef>
-          <a:fontRef idx="minor">
-            <a:schemeClr val="tx1"/>
-          </a:fontRef>
-        </p:style>
-      </p:cxnSp>
-      <p:cxnSp>
-        <p:nvCxnSpPr>
-          <p:cNvPr id="37" name="Straight Connector 36">
-            <a:extLst>
-              <a:ext uri="{FF2B5EF4-FFF2-40B4-BE49-F238E27FC236}">
-                <a16:creationId xmlns:a16="http://schemas.microsoft.com/office/drawing/2014/main" id="{50CA53F6-83EC-76CD-2955-C0595FDAE11E}"/>
-              </a:ext>
-            </a:extLst>
-          </p:cNvPr>
-          <p:cNvCxnSpPr>
-            <a:cxnSpLocks/>
-          </p:cNvCxnSpPr>
-          <p:nvPr/>
-        </p:nvCxnSpPr>
-        <p:spPr>
-          <a:xfrm>
-            <a:off x="3794449" y="3191069"/>
-            <a:ext cx="2690327" cy="914399"/>
-          </a:xfrm>
-          <a:prstGeom prst="line">
-            <a:avLst/>
-          </a:prstGeom>
-        </p:spPr>
-        <p:style>
-          <a:lnRef idx="1">
-            <a:schemeClr val="dk1"/>
-          </a:lnRef>
-          <a:fillRef idx="0">
-            <a:schemeClr val="dk1"/>
-          </a:fillRef>
-          <a:effectRef idx="0">
-            <a:schemeClr val="dk1"/>
-          </a:effectRef>
-          <a:fontRef idx="minor">
-            <a:schemeClr val="tx1"/>
-          </a:fontRef>
-        </p:style>
-      </p:cxnSp>
-      <p:cxnSp>
-        <p:nvCxnSpPr>
-          <p:cNvPr id="40" name="Straight Connector 39">
-            <a:extLst>
-              <a:ext uri="{FF2B5EF4-FFF2-40B4-BE49-F238E27FC236}">
-                <a16:creationId xmlns:a16="http://schemas.microsoft.com/office/drawing/2014/main" id="{C82524A1-0E85-7CBD-26C8-4D8C13E449A5}"/>
-              </a:ext>
-            </a:extLst>
-          </p:cNvPr>
-          <p:cNvCxnSpPr>
-            <a:cxnSpLocks/>
-          </p:cNvCxnSpPr>
-          <p:nvPr/>
-        </p:nvCxnSpPr>
-        <p:spPr>
-          <a:xfrm>
-            <a:off x="3642047" y="3165543"/>
-            <a:ext cx="3020009" cy="2034074"/>
-          </a:xfrm>
-          <a:prstGeom prst="line">
-            <a:avLst/>
-          </a:prstGeom>
-        </p:spPr>
-        <p:style>
-          <a:lnRef idx="1">
-            <a:schemeClr val="dk1"/>
-          </a:lnRef>
-          <a:fillRef idx="0">
-            <a:schemeClr val="dk1"/>
-          </a:fillRef>
-          <a:effectRef idx="0">
-            <a:schemeClr val="dk1"/>
-          </a:effectRef>
-          <a:fontRef idx="minor">
-            <a:schemeClr val="tx1"/>
-          </a:fontRef>
-        </p:style>
-      </p:cxnSp>
+      </p:pic>
     </p:spTree>
     <p:extLst>
       <p:ext uri="{BB962C8B-B14F-4D97-AF65-F5344CB8AC3E}">
@@ -6779,1086 +6157,42 @@
           </a:p>
         </p:txBody>
       </p:sp>
-      <p:sp>
-        <p:nvSpPr>
-          <p:cNvPr id="6" name="Rectangle 5">
+      <p:pic>
+        <p:nvPicPr>
+          <p:cNvPr id="4" name="Picture 3">
             <a:extLst>
               <a:ext uri="{FF2B5EF4-FFF2-40B4-BE49-F238E27FC236}">
-                <a16:creationId xmlns:a16="http://schemas.microsoft.com/office/drawing/2014/main" id="{A6261F31-C7A1-4E78-80D7-C2865B6924AD}"/>
+                <a16:creationId xmlns:a16="http://schemas.microsoft.com/office/drawing/2014/main" id="{7965AFFD-83E1-6E8F-68F2-8878663CE05F}"/>
               </a:ext>
             </a:extLst>
           </p:cNvPr>
-          <p:cNvSpPr/>
+          <p:cNvPicPr>
+            <a:picLocks noChangeAspect="1"/>
+          </p:cNvPicPr>
           <p:nvPr/>
-        </p:nvSpPr>
+        </p:nvPicPr>
+        <p:blipFill>
+          <a:blip r:embed="rId2">
+            <a:extLst>
+              <a:ext uri="{28A0092B-C50C-407E-A947-70E740481C1C}">
+                <a14:useLocalDpi xmlns:a14="http://schemas.microsoft.com/office/drawing/2010/main" val="0"/>
+              </a:ext>
+            </a:extLst>
+          </a:blip>
+          <a:stretch>
+            <a:fillRect/>
+          </a:stretch>
+        </p:blipFill>
         <p:spPr>
           <a:xfrm>
-            <a:off x="1402898" y="5417360"/>
-            <a:ext cx="989044" cy="427977"/>
+            <a:off x="2132888" y="867746"/>
+            <a:ext cx="7926224" cy="5701005"/>
           </a:xfrm>
           <a:prstGeom prst="rect">
             <a:avLst/>
           </a:prstGeom>
         </p:spPr>
-        <p:style>
-          <a:lnRef idx="2">
-            <a:schemeClr val="accent6"/>
-          </a:lnRef>
-          <a:fillRef idx="1">
-            <a:schemeClr val="lt1"/>
-          </a:fillRef>
-          <a:effectRef idx="0">
-            <a:schemeClr val="accent6"/>
-          </a:effectRef>
-          <a:fontRef idx="minor">
-            <a:schemeClr val="dk1"/>
-          </a:fontRef>
-        </p:style>
-        <p:txBody>
-          <a:bodyPr rtlCol="0" anchor="ctr"/>
-          <a:lstStyle/>
-          <a:p>
-            <a:pPr algn="ctr"/>
-            <a:r>
-              <a:rPr lang="en-IN" dirty="0"/>
-              <a:t>User</a:t>
-            </a:r>
-          </a:p>
-        </p:txBody>
-      </p:sp>
-      <p:sp>
-        <p:nvSpPr>
-          <p:cNvPr id="7" name="Rectangle 6">
-            <a:extLst>
-              <a:ext uri="{FF2B5EF4-FFF2-40B4-BE49-F238E27FC236}">
-                <a16:creationId xmlns:a16="http://schemas.microsoft.com/office/drawing/2014/main" id="{215C2DF6-2639-B299-44D5-A2768EFF95B3}"/>
-              </a:ext>
-            </a:extLst>
-          </p:cNvPr>
-          <p:cNvSpPr/>
-          <p:nvPr/>
-        </p:nvSpPr>
-        <p:spPr>
-          <a:xfrm>
-            <a:off x="3340357" y="1222763"/>
-            <a:ext cx="1707501" cy="427977"/>
-          </a:xfrm>
-          <a:prstGeom prst="rect">
-            <a:avLst/>
-          </a:prstGeom>
-        </p:spPr>
-        <p:style>
-          <a:lnRef idx="2">
-            <a:schemeClr val="accent6"/>
-          </a:lnRef>
-          <a:fillRef idx="1">
-            <a:schemeClr val="lt1"/>
-          </a:fillRef>
-          <a:effectRef idx="0">
-            <a:schemeClr val="accent6"/>
-          </a:effectRef>
-          <a:fontRef idx="minor">
-            <a:schemeClr val="dk1"/>
-          </a:fontRef>
-        </p:style>
-        <p:txBody>
-          <a:bodyPr rtlCol="0" anchor="ctr"/>
-          <a:lstStyle/>
-          <a:p>
-            <a:pPr algn="ctr"/>
-            <a:r>
-              <a:rPr lang="en-IN" dirty="0" err="1"/>
-              <a:t>Streamlit</a:t>
-            </a:r>
-            <a:r>
-              <a:rPr lang="en-IN" dirty="0"/>
-              <a:t> App</a:t>
-            </a:r>
-          </a:p>
-        </p:txBody>
-      </p:sp>
-      <p:sp>
-        <p:nvSpPr>
-          <p:cNvPr id="8" name="Rectangle 7">
-            <a:extLst>
-              <a:ext uri="{FF2B5EF4-FFF2-40B4-BE49-F238E27FC236}">
-                <a16:creationId xmlns:a16="http://schemas.microsoft.com/office/drawing/2014/main" id="{97AB9D61-004F-CAED-589E-930CB9251512}"/>
-              </a:ext>
-            </a:extLst>
-          </p:cNvPr>
-          <p:cNvSpPr/>
-          <p:nvPr/>
-        </p:nvSpPr>
-        <p:spPr>
-          <a:xfrm>
-            <a:off x="6148872" y="1222762"/>
-            <a:ext cx="2136712" cy="427977"/>
-          </a:xfrm>
-          <a:prstGeom prst="rect">
-            <a:avLst/>
-          </a:prstGeom>
-        </p:spPr>
-        <p:style>
-          <a:lnRef idx="2">
-            <a:schemeClr val="accent6"/>
-          </a:lnRef>
-          <a:fillRef idx="1">
-            <a:schemeClr val="lt1"/>
-          </a:fillRef>
-          <a:effectRef idx="0">
-            <a:schemeClr val="accent6"/>
-          </a:effectRef>
-          <a:fontRef idx="minor">
-            <a:schemeClr val="dk1"/>
-          </a:fontRef>
-        </p:style>
-        <p:txBody>
-          <a:bodyPr rtlCol="0" anchor="ctr"/>
-          <a:lstStyle/>
-          <a:p>
-            <a:pPr algn="ctr"/>
-            <a:r>
-              <a:rPr lang="en-IN" dirty="0"/>
-              <a:t>Data Preprocessor</a:t>
-            </a:r>
-          </a:p>
-        </p:txBody>
-      </p:sp>
-      <p:sp>
-        <p:nvSpPr>
-          <p:cNvPr id="9" name="Rectangle 8">
-            <a:extLst>
-              <a:ext uri="{FF2B5EF4-FFF2-40B4-BE49-F238E27FC236}">
-                <a16:creationId xmlns:a16="http://schemas.microsoft.com/office/drawing/2014/main" id="{488C9EE3-9E48-7DD0-96FD-91CF1621DDD7}"/>
-              </a:ext>
-            </a:extLst>
-          </p:cNvPr>
-          <p:cNvSpPr/>
-          <p:nvPr/>
-        </p:nvSpPr>
-        <p:spPr>
-          <a:xfrm>
-            <a:off x="9479902" y="1222762"/>
-            <a:ext cx="1873898" cy="427977"/>
-          </a:xfrm>
-          <a:prstGeom prst="rect">
-            <a:avLst/>
-          </a:prstGeom>
-        </p:spPr>
-        <p:style>
-          <a:lnRef idx="2">
-            <a:schemeClr val="accent6"/>
-          </a:lnRef>
-          <a:fillRef idx="1">
-            <a:schemeClr val="lt1"/>
-          </a:fillRef>
-          <a:effectRef idx="0">
-            <a:schemeClr val="accent6"/>
-          </a:effectRef>
-          <a:fontRef idx="minor">
-            <a:schemeClr val="dk1"/>
-          </a:fontRef>
-        </p:style>
-        <p:txBody>
-          <a:bodyPr rtlCol="0" anchor="ctr"/>
-          <a:lstStyle/>
-          <a:p>
-            <a:pPr algn="ctr"/>
-            <a:r>
-              <a:rPr lang="en-IN" dirty="0"/>
-              <a:t>Cluster Analyzer</a:t>
-            </a:r>
-          </a:p>
-        </p:txBody>
-      </p:sp>
-      <p:sp>
-        <p:nvSpPr>
-          <p:cNvPr id="10" name="Rectangle 9">
-            <a:extLst>
-              <a:ext uri="{FF2B5EF4-FFF2-40B4-BE49-F238E27FC236}">
-                <a16:creationId xmlns:a16="http://schemas.microsoft.com/office/drawing/2014/main" id="{B458127C-3AE4-DA4A-E9CD-024FC3A111D4}"/>
-              </a:ext>
-            </a:extLst>
-          </p:cNvPr>
-          <p:cNvSpPr/>
-          <p:nvPr/>
-        </p:nvSpPr>
-        <p:spPr>
-          <a:xfrm>
-            <a:off x="1402703" y="1226651"/>
-            <a:ext cx="989044" cy="427977"/>
-          </a:xfrm>
-          <a:prstGeom prst="rect">
-            <a:avLst/>
-          </a:prstGeom>
-        </p:spPr>
-        <p:style>
-          <a:lnRef idx="2">
-            <a:schemeClr val="accent6"/>
-          </a:lnRef>
-          <a:fillRef idx="1">
-            <a:schemeClr val="lt1"/>
-          </a:fillRef>
-          <a:effectRef idx="0">
-            <a:schemeClr val="accent6"/>
-          </a:effectRef>
-          <a:fontRef idx="minor">
-            <a:schemeClr val="dk1"/>
-          </a:fontRef>
-        </p:style>
-        <p:txBody>
-          <a:bodyPr rtlCol="0" anchor="ctr"/>
-          <a:lstStyle/>
-          <a:p>
-            <a:pPr algn="ctr"/>
-            <a:r>
-              <a:rPr lang="en-IN" dirty="0"/>
-              <a:t>User</a:t>
-            </a:r>
-          </a:p>
-        </p:txBody>
-      </p:sp>
-      <p:sp>
-        <p:nvSpPr>
-          <p:cNvPr id="12" name="Rectangle 11">
-            <a:extLst>
-              <a:ext uri="{FF2B5EF4-FFF2-40B4-BE49-F238E27FC236}">
-                <a16:creationId xmlns:a16="http://schemas.microsoft.com/office/drawing/2014/main" id="{04C1FA3F-9A73-9C5A-3892-141A6BCFFF3E}"/>
-              </a:ext>
-            </a:extLst>
-          </p:cNvPr>
-          <p:cNvSpPr/>
-          <p:nvPr/>
-        </p:nvSpPr>
-        <p:spPr>
-          <a:xfrm>
-            <a:off x="3340357" y="5421247"/>
-            <a:ext cx="1707501" cy="424090"/>
-          </a:xfrm>
-          <a:prstGeom prst="rect">
-            <a:avLst/>
-          </a:prstGeom>
-        </p:spPr>
-        <p:style>
-          <a:lnRef idx="2">
-            <a:schemeClr val="accent6"/>
-          </a:lnRef>
-          <a:fillRef idx="1">
-            <a:schemeClr val="lt1"/>
-          </a:fillRef>
-          <a:effectRef idx="0">
-            <a:schemeClr val="accent6"/>
-          </a:effectRef>
-          <a:fontRef idx="minor">
-            <a:schemeClr val="dk1"/>
-          </a:fontRef>
-        </p:style>
-        <p:txBody>
-          <a:bodyPr rtlCol="0" anchor="ctr"/>
-          <a:lstStyle/>
-          <a:p>
-            <a:pPr algn="ctr"/>
-            <a:r>
-              <a:rPr lang="en-IN" dirty="0" err="1"/>
-              <a:t>Streamlit</a:t>
-            </a:r>
-            <a:r>
-              <a:rPr lang="en-IN" dirty="0"/>
-              <a:t> App</a:t>
-            </a:r>
-          </a:p>
-        </p:txBody>
-      </p:sp>
-      <p:sp>
-        <p:nvSpPr>
-          <p:cNvPr id="13" name="Rectangle 12">
-            <a:extLst>
-              <a:ext uri="{FF2B5EF4-FFF2-40B4-BE49-F238E27FC236}">
-                <a16:creationId xmlns:a16="http://schemas.microsoft.com/office/drawing/2014/main" id="{6132BB0B-CB70-0811-82D2-440D709C6A72}"/>
-              </a:ext>
-            </a:extLst>
-          </p:cNvPr>
-          <p:cNvSpPr/>
-          <p:nvPr/>
-        </p:nvSpPr>
-        <p:spPr>
-          <a:xfrm>
-            <a:off x="6148872" y="5417359"/>
-            <a:ext cx="2136712" cy="427977"/>
-          </a:xfrm>
-          <a:prstGeom prst="rect">
-            <a:avLst/>
-          </a:prstGeom>
-        </p:spPr>
-        <p:style>
-          <a:lnRef idx="2">
-            <a:schemeClr val="accent6"/>
-          </a:lnRef>
-          <a:fillRef idx="1">
-            <a:schemeClr val="lt1"/>
-          </a:fillRef>
-          <a:effectRef idx="0">
-            <a:schemeClr val="accent6"/>
-          </a:effectRef>
-          <a:fontRef idx="minor">
-            <a:schemeClr val="dk1"/>
-          </a:fontRef>
-        </p:style>
-        <p:txBody>
-          <a:bodyPr rtlCol="0" anchor="ctr"/>
-          <a:lstStyle/>
-          <a:p>
-            <a:pPr algn="ctr"/>
-            <a:r>
-              <a:rPr lang="en-IN" dirty="0"/>
-              <a:t>ML Model Selector</a:t>
-            </a:r>
-          </a:p>
-        </p:txBody>
-      </p:sp>
-      <p:sp>
-        <p:nvSpPr>
-          <p:cNvPr id="14" name="Rectangle 13">
-            <a:extLst>
-              <a:ext uri="{FF2B5EF4-FFF2-40B4-BE49-F238E27FC236}">
-                <a16:creationId xmlns:a16="http://schemas.microsoft.com/office/drawing/2014/main" id="{A043528B-181D-9117-0308-7F765B80F323}"/>
-              </a:ext>
-            </a:extLst>
-          </p:cNvPr>
-          <p:cNvSpPr/>
-          <p:nvPr/>
-        </p:nvSpPr>
-        <p:spPr>
-          <a:xfrm>
-            <a:off x="9479902" y="5406211"/>
-            <a:ext cx="1873898" cy="427977"/>
-          </a:xfrm>
-          <a:prstGeom prst="rect">
-            <a:avLst/>
-          </a:prstGeom>
-        </p:spPr>
-        <p:style>
-          <a:lnRef idx="2">
-            <a:schemeClr val="accent6"/>
-          </a:lnRef>
-          <a:fillRef idx="1">
-            <a:schemeClr val="lt1"/>
-          </a:fillRef>
-          <a:effectRef idx="0">
-            <a:schemeClr val="accent6"/>
-          </a:effectRef>
-          <a:fontRef idx="minor">
-            <a:schemeClr val="dk1"/>
-          </a:fontRef>
-        </p:style>
-        <p:txBody>
-          <a:bodyPr rtlCol="0" anchor="ctr"/>
-          <a:lstStyle/>
-          <a:p>
-            <a:pPr algn="ctr"/>
-            <a:r>
-              <a:rPr lang="en-IN" dirty="0"/>
-              <a:t>File System</a:t>
-            </a:r>
-          </a:p>
-        </p:txBody>
-      </p:sp>
-      <p:cxnSp>
-        <p:nvCxnSpPr>
-          <p:cNvPr id="16" name="Straight Connector 15">
-            <a:extLst>
-              <a:ext uri="{FF2B5EF4-FFF2-40B4-BE49-F238E27FC236}">
-                <a16:creationId xmlns:a16="http://schemas.microsoft.com/office/drawing/2014/main" id="{B025A65D-45CD-E301-70FF-C0F26ACBA6CC}"/>
-              </a:ext>
-            </a:extLst>
-          </p:cNvPr>
-          <p:cNvCxnSpPr>
-            <a:cxnSpLocks/>
-            <a:stCxn id="10" idx="2"/>
-            <a:endCxn id="6" idx="0"/>
-          </p:cNvCxnSpPr>
-          <p:nvPr/>
-        </p:nvCxnSpPr>
-        <p:spPr>
-          <a:xfrm>
-            <a:off x="1897225" y="1654628"/>
-            <a:ext cx="195" cy="3762732"/>
-          </a:xfrm>
-          <a:prstGeom prst="line">
-            <a:avLst/>
-          </a:prstGeom>
-        </p:spPr>
-        <p:style>
-          <a:lnRef idx="1">
-            <a:schemeClr val="dk1"/>
-          </a:lnRef>
-          <a:fillRef idx="0">
-            <a:schemeClr val="dk1"/>
-          </a:fillRef>
-          <a:effectRef idx="0">
-            <a:schemeClr val="dk1"/>
-          </a:effectRef>
-          <a:fontRef idx="minor">
-            <a:schemeClr val="tx1"/>
-          </a:fontRef>
-        </p:style>
-      </p:cxnSp>
-      <p:cxnSp>
-        <p:nvCxnSpPr>
-          <p:cNvPr id="17" name="Straight Connector 16">
-            <a:extLst>
-              <a:ext uri="{FF2B5EF4-FFF2-40B4-BE49-F238E27FC236}">
-                <a16:creationId xmlns:a16="http://schemas.microsoft.com/office/drawing/2014/main" id="{9329A665-6BB6-C482-D33F-62C6BE1E3B1E}"/>
-              </a:ext>
-            </a:extLst>
-          </p:cNvPr>
-          <p:cNvCxnSpPr>
-            <a:cxnSpLocks/>
-            <a:endCxn id="12" idx="0"/>
-          </p:cNvCxnSpPr>
-          <p:nvPr/>
-        </p:nvCxnSpPr>
-        <p:spPr>
-          <a:xfrm>
-            <a:off x="4182540" y="1645910"/>
-            <a:ext cx="11568" cy="3775337"/>
-          </a:xfrm>
-          <a:prstGeom prst="line">
-            <a:avLst/>
-          </a:prstGeom>
-        </p:spPr>
-        <p:style>
-          <a:lnRef idx="1">
-            <a:schemeClr val="dk1"/>
-          </a:lnRef>
-          <a:fillRef idx="0">
-            <a:schemeClr val="dk1"/>
-          </a:fillRef>
-          <a:effectRef idx="0">
-            <a:schemeClr val="dk1"/>
-          </a:effectRef>
-          <a:fontRef idx="minor">
-            <a:schemeClr val="tx1"/>
-          </a:fontRef>
-        </p:style>
-      </p:cxnSp>
-      <p:cxnSp>
-        <p:nvCxnSpPr>
-          <p:cNvPr id="18" name="Straight Connector 17">
-            <a:extLst>
-              <a:ext uri="{FF2B5EF4-FFF2-40B4-BE49-F238E27FC236}">
-                <a16:creationId xmlns:a16="http://schemas.microsoft.com/office/drawing/2014/main" id="{D508CD0D-2467-AA33-2F6D-57BC34079A13}"/>
-              </a:ext>
-            </a:extLst>
-          </p:cNvPr>
-          <p:cNvCxnSpPr>
-            <a:cxnSpLocks/>
-            <a:endCxn id="13" idx="0"/>
-          </p:cNvCxnSpPr>
-          <p:nvPr/>
-        </p:nvCxnSpPr>
-        <p:spPr>
-          <a:xfrm flipH="1">
-            <a:off x="7217228" y="1650739"/>
-            <a:ext cx="1750" cy="3766620"/>
-          </a:xfrm>
-          <a:prstGeom prst="line">
-            <a:avLst/>
-          </a:prstGeom>
-        </p:spPr>
-        <p:style>
-          <a:lnRef idx="1">
-            <a:schemeClr val="dk1"/>
-          </a:lnRef>
-          <a:fillRef idx="0">
-            <a:schemeClr val="dk1"/>
-          </a:fillRef>
-          <a:effectRef idx="0">
-            <a:schemeClr val="dk1"/>
-          </a:effectRef>
-          <a:fontRef idx="minor">
-            <a:schemeClr val="tx1"/>
-          </a:fontRef>
-        </p:style>
-      </p:cxnSp>
-      <p:cxnSp>
-        <p:nvCxnSpPr>
-          <p:cNvPr id="19" name="Straight Connector 18">
-            <a:extLst>
-              <a:ext uri="{FF2B5EF4-FFF2-40B4-BE49-F238E27FC236}">
-                <a16:creationId xmlns:a16="http://schemas.microsoft.com/office/drawing/2014/main" id="{6D14AAD8-27DF-4C0E-E7A8-441232D2FB7C}"/>
-              </a:ext>
-            </a:extLst>
-          </p:cNvPr>
-          <p:cNvCxnSpPr>
-            <a:cxnSpLocks/>
-            <a:endCxn id="14" idx="0"/>
-          </p:cNvCxnSpPr>
-          <p:nvPr/>
-        </p:nvCxnSpPr>
-        <p:spPr>
-          <a:xfrm flipH="1">
-            <a:off x="10416851" y="1650739"/>
-            <a:ext cx="1750" cy="3755472"/>
-          </a:xfrm>
-          <a:prstGeom prst="line">
-            <a:avLst/>
-          </a:prstGeom>
-        </p:spPr>
-        <p:style>
-          <a:lnRef idx="1">
-            <a:schemeClr val="dk1"/>
-          </a:lnRef>
-          <a:fillRef idx="0">
-            <a:schemeClr val="dk1"/>
-          </a:fillRef>
-          <a:effectRef idx="0">
-            <a:schemeClr val="dk1"/>
-          </a:effectRef>
-          <a:fontRef idx="minor">
-            <a:schemeClr val="tx1"/>
-          </a:fontRef>
-        </p:style>
-      </p:cxnSp>
-      <p:cxnSp>
-        <p:nvCxnSpPr>
-          <p:cNvPr id="21" name="Straight Arrow Connector 20">
-            <a:extLst>
-              <a:ext uri="{FF2B5EF4-FFF2-40B4-BE49-F238E27FC236}">
-                <a16:creationId xmlns:a16="http://schemas.microsoft.com/office/drawing/2014/main" id="{BC21993D-0A05-CEAA-88CC-307BB93BE8C6}"/>
-              </a:ext>
-            </a:extLst>
-          </p:cNvPr>
-          <p:cNvCxnSpPr/>
-          <p:nvPr/>
-        </p:nvCxnSpPr>
-        <p:spPr>
-          <a:xfrm>
-            <a:off x="1897225" y="2228850"/>
-            <a:ext cx="2291733" cy="0"/>
-          </a:xfrm>
-          <a:prstGeom prst="straightConnector1">
-            <a:avLst/>
-          </a:prstGeom>
-          <a:ln>
-            <a:tailEnd type="triangle"/>
-          </a:ln>
-        </p:spPr>
-        <p:style>
-          <a:lnRef idx="1">
-            <a:schemeClr val="dk1"/>
-          </a:lnRef>
-          <a:fillRef idx="0">
-            <a:schemeClr val="dk1"/>
-          </a:fillRef>
-          <a:effectRef idx="0">
-            <a:schemeClr val="dk1"/>
-          </a:effectRef>
-          <a:fontRef idx="minor">
-            <a:schemeClr val="tx1"/>
-          </a:fontRef>
-        </p:style>
-      </p:cxnSp>
-      <p:cxnSp>
-        <p:nvCxnSpPr>
-          <p:cNvPr id="23" name="Straight Arrow Connector 22">
-            <a:extLst>
-              <a:ext uri="{FF2B5EF4-FFF2-40B4-BE49-F238E27FC236}">
-                <a16:creationId xmlns:a16="http://schemas.microsoft.com/office/drawing/2014/main" id="{6DBB2500-C398-9703-CFB6-BE4D3DFE4759}"/>
-              </a:ext>
-            </a:extLst>
-          </p:cNvPr>
-          <p:cNvCxnSpPr/>
-          <p:nvPr/>
-        </p:nvCxnSpPr>
-        <p:spPr>
-          <a:xfrm>
-            <a:off x="1897225" y="2771775"/>
-            <a:ext cx="5320003" cy="0"/>
-          </a:xfrm>
-          <a:prstGeom prst="straightConnector1">
-            <a:avLst/>
-          </a:prstGeom>
-          <a:ln>
-            <a:tailEnd type="triangle"/>
-          </a:ln>
-        </p:spPr>
-        <p:style>
-          <a:lnRef idx="1">
-            <a:schemeClr val="dk1"/>
-          </a:lnRef>
-          <a:fillRef idx="0">
-            <a:schemeClr val="dk1"/>
-          </a:fillRef>
-          <a:effectRef idx="0">
-            <a:schemeClr val="dk1"/>
-          </a:effectRef>
-          <a:fontRef idx="minor">
-            <a:schemeClr val="tx1"/>
-          </a:fontRef>
-        </p:style>
-      </p:cxnSp>
-      <p:cxnSp>
-        <p:nvCxnSpPr>
-          <p:cNvPr id="25" name="Straight Arrow Connector 24">
-            <a:extLst>
-              <a:ext uri="{FF2B5EF4-FFF2-40B4-BE49-F238E27FC236}">
-                <a16:creationId xmlns:a16="http://schemas.microsoft.com/office/drawing/2014/main" id="{0D926A74-4EE1-76EE-F6CA-9A999339128B}"/>
-              </a:ext>
-            </a:extLst>
-          </p:cNvPr>
-          <p:cNvCxnSpPr/>
-          <p:nvPr/>
-        </p:nvCxnSpPr>
-        <p:spPr>
-          <a:xfrm flipV="1">
-            <a:off x="4188958" y="3362325"/>
-            <a:ext cx="6227893" cy="66675"/>
-          </a:xfrm>
-          <a:prstGeom prst="straightConnector1">
-            <a:avLst/>
-          </a:prstGeom>
-          <a:ln>
-            <a:tailEnd type="triangle"/>
-          </a:ln>
-        </p:spPr>
-        <p:style>
-          <a:lnRef idx="1">
-            <a:schemeClr val="dk1"/>
-          </a:lnRef>
-          <a:fillRef idx="0">
-            <a:schemeClr val="dk1"/>
-          </a:fillRef>
-          <a:effectRef idx="0">
-            <a:schemeClr val="dk1"/>
-          </a:effectRef>
-          <a:fontRef idx="minor">
-            <a:schemeClr val="tx1"/>
-          </a:fontRef>
-        </p:style>
-      </p:cxnSp>
-      <p:cxnSp>
-        <p:nvCxnSpPr>
-          <p:cNvPr id="27" name="Straight Arrow Connector 26">
-            <a:extLst>
-              <a:ext uri="{FF2B5EF4-FFF2-40B4-BE49-F238E27FC236}">
-                <a16:creationId xmlns:a16="http://schemas.microsoft.com/office/drawing/2014/main" id="{844479AA-150C-B3CD-E0BD-EF6EF0FD616A}"/>
-              </a:ext>
-            </a:extLst>
-          </p:cNvPr>
-          <p:cNvCxnSpPr>
-            <a:cxnSpLocks/>
-          </p:cNvCxnSpPr>
-          <p:nvPr/>
-        </p:nvCxnSpPr>
-        <p:spPr>
-          <a:xfrm>
-            <a:off x="7217228" y="3714750"/>
-            <a:ext cx="3199623" cy="0"/>
-          </a:xfrm>
-          <a:prstGeom prst="straightConnector1">
-            <a:avLst/>
-          </a:prstGeom>
-          <a:ln>
-            <a:tailEnd type="triangle"/>
-          </a:ln>
-        </p:spPr>
-        <p:style>
-          <a:lnRef idx="1">
-            <a:schemeClr val="dk1"/>
-          </a:lnRef>
-          <a:fillRef idx="0">
-            <a:schemeClr val="dk1"/>
-          </a:fillRef>
-          <a:effectRef idx="0">
-            <a:schemeClr val="dk1"/>
-          </a:effectRef>
-          <a:fontRef idx="minor">
-            <a:schemeClr val="tx1"/>
-          </a:fontRef>
-        </p:style>
-      </p:cxnSp>
-      <p:cxnSp>
-        <p:nvCxnSpPr>
-          <p:cNvPr id="31" name="Straight Arrow Connector 30">
-            <a:extLst>
-              <a:ext uri="{FF2B5EF4-FFF2-40B4-BE49-F238E27FC236}">
-                <a16:creationId xmlns:a16="http://schemas.microsoft.com/office/drawing/2014/main" id="{3480D5E3-D7AA-0900-55C7-0FEF6E52AB3A}"/>
-              </a:ext>
-            </a:extLst>
-          </p:cNvPr>
-          <p:cNvCxnSpPr>
-            <a:cxnSpLocks/>
-          </p:cNvCxnSpPr>
-          <p:nvPr/>
-        </p:nvCxnSpPr>
-        <p:spPr>
-          <a:xfrm flipH="1">
-            <a:off x="7217228" y="4019550"/>
-            <a:ext cx="3199623" cy="0"/>
-          </a:xfrm>
-          <a:prstGeom prst="straightConnector1">
-            <a:avLst/>
-          </a:prstGeom>
-          <a:ln>
-            <a:tailEnd type="triangle"/>
-          </a:ln>
-        </p:spPr>
-        <p:style>
-          <a:lnRef idx="1">
-            <a:schemeClr val="dk1"/>
-          </a:lnRef>
-          <a:fillRef idx="0">
-            <a:schemeClr val="dk1"/>
-          </a:fillRef>
-          <a:effectRef idx="0">
-            <a:schemeClr val="dk1"/>
-          </a:effectRef>
-          <a:fontRef idx="minor">
-            <a:schemeClr val="tx1"/>
-          </a:fontRef>
-        </p:style>
-      </p:cxnSp>
-      <p:cxnSp>
-        <p:nvCxnSpPr>
-          <p:cNvPr id="41" name="Straight Arrow Connector 40">
-            <a:extLst>
-              <a:ext uri="{FF2B5EF4-FFF2-40B4-BE49-F238E27FC236}">
-                <a16:creationId xmlns:a16="http://schemas.microsoft.com/office/drawing/2014/main" id="{6AE5C38D-C399-55B0-6374-2AC7A8B8DFD4}"/>
-              </a:ext>
-            </a:extLst>
-          </p:cNvPr>
-          <p:cNvCxnSpPr>
-            <a:cxnSpLocks/>
-          </p:cNvCxnSpPr>
-          <p:nvPr/>
-        </p:nvCxnSpPr>
-        <p:spPr>
-          <a:xfrm flipH="1">
-            <a:off x="7217228" y="4378159"/>
-            <a:ext cx="3199623" cy="0"/>
-          </a:xfrm>
-          <a:prstGeom prst="straightConnector1">
-            <a:avLst/>
-          </a:prstGeom>
-          <a:ln>
-            <a:tailEnd type="triangle"/>
-          </a:ln>
-        </p:spPr>
-        <p:style>
-          <a:lnRef idx="1">
-            <a:schemeClr val="dk1"/>
-          </a:lnRef>
-          <a:fillRef idx="0">
-            <a:schemeClr val="dk1"/>
-          </a:fillRef>
-          <a:effectRef idx="0">
-            <a:schemeClr val="dk1"/>
-          </a:effectRef>
-          <a:fontRef idx="minor">
-            <a:schemeClr val="tx1"/>
-          </a:fontRef>
-        </p:style>
-      </p:cxnSp>
-      <p:cxnSp>
-        <p:nvCxnSpPr>
-          <p:cNvPr id="47" name="Straight Arrow Connector 46">
-            <a:extLst>
-              <a:ext uri="{FF2B5EF4-FFF2-40B4-BE49-F238E27FC236}">
-                <a16:creationId xmlns:a16="http://schemas.microsoft.com/office/drawing/2014/main" id="{52E8AD3F-23B4-5D72-5B6A-367CDAD1013C}"/>
-              </a:ext>
-            </a:extLst>
-          </p:cNvPr>
-          <p:cNvCxnSpPr>
-            <a:cxnSpLocks/>
-          </p:cNvCxnSpPr>
-          <p:nvPr/>
-        </p:nvCxnSpPr>
-        <p:spPr>
-          <a:xfrm flipH="1">
-            <a:off x="7217228" y="4838700"/>
-            <a:ext cx="3199623" cy="0"/>
-          </a:xfrm>
-          <a:prstGeom prst="straightConnector1">
-            <a:avLst/>
-          </a:prstGeom>
-          <a:ln>
-            <a:tailEnd type="triangle"/>
-          </a:ln>
-        </p:spPr>
-        <p:style>
-          <a:lnRef idx="1">
-            <a:schemeClr val="dk1"/>
-          </a:lnRef>
-          <a:fillRef idx="0">
-            <a:schemeClr val="dk1"/>
-          </a:fillRef>
-          <a:effectRef idx="0">
-            <a:schemeClr val="dk1"/>
-          </a:effectRef>
-          <a:fontRef idx="minor">
-            <a:schemeClr val="tx1"/>
-          </a:fontRef>
-        </p:style>
-      </p:cxnSp>
-      <p:sp>
-        <p:nvSpPr>
-          <p:cNvPr id="49" name="TextBox 48">
-            <a:extLst>
-              <a:ext uri="{FF2B5EF4-FFF2-40B4-BE49-F238E27FC236}">
-                <a16:creationId xmlns:a16="http://schemas.microsoft.com/office/drawing/2014/main" id="{3E2721CB-A404-94AA-5157-153762194B77}"/>
-              </a:ext>
-            </a:extLst>
-          </p:cNvPr>
-          <p:cNvSpPr txBox="1"/>
-          <p:nvPr/>
-        </p:nvSpPr>
-        <p:spPr>
-          <a:xfrm>
-            <a:off x="2076450" y="1847851"/>
-            <a:ext cx="1780785" cy="377112"/>
-          </a:xfrm>
-          <a:prstGeom prst="rect">
-            <a:avLst/>
-          </a:prstGeom>
-          <a:noFill/>
-        </p:spPr>
-        <p:txBody>
-          <a:bodyPr wrap="square" rtlCol="0">
-            <a:spAutoFit/>
-          </a:bodyPr>
-          <a:lstStyle/>
-          <a:p>
-            <a:r>
-              <a:rPr lang="en-IN" dirty="0"/>
-              <a:t>Upload dataset</a:t>
-            </a:r>
-          </a:p>
-        </p:txBody>
-      </p:sp>
-      <p:sp>
-        <p:nvSpPr>
-          <p:cNvPr id="50" name="TextBox 49">
-            <a:extLst>
-              <a:ext uri="{FF2B5EF4-FFF2-40B4-BE49-F238E27FC236}">
-                <a16:creationId xmlns:a16="http://schemas.microsoft.com/office/drawing/2014/main" id="{5E2985C4-A546-BF43-BACD-90926C315413}"/>
-              </a:ext>
-            </a:extLst>
-          </p:cNvPr>
-          <p:cNvSpPr txBox="1"/>
-          <p:nvPr/>
-        </p:nvSpPr>
-        <p:spPr>
-          <a:xfrm>
-            <a:off x="2324100" y="2413167"/>
-            <a:ext cx="4423875" cy="369332"/>
-          </a:xfrm>
-          <a:prstGeom prst="rect">
-            <a:avLst/>
-          </a:prstGeom>
-          <a:noFill/>
-        </p:spPr>
-        <p:txBody>
-          <a:bodyPr wrap="square" rtlCol="0">
-            <a:spAutoFit/>
-          </a:bodyPr>
-          <a:lstStyle/>
-          <a:p>
-            <a:r>
-              <a:rPr lang="en-IN" dirty="0"/>
-              <a:t>Perform preprocessing-(null </a:t>
-            </a:r>
-            <a:r>
-              <a:rPr lang="en-IN" dirty="0" err="1"/>
-              <a:t>handling,etc</a:t>
-            </a:r>
-            <a:r>
-              <a:rPr lang="en-IN" dirty="0"/>
-              <a:t>.)</a:t>
-            </a:r>
-          </a:p>
-        </p:txBody>
-      </p:sp>
-      <p:sp>
-        <p:nvSpPr>
-          <p:cNvPr id="51" name="TextBox 50">
-            <a:extLst>
-              <a:ext uri="{FF2B5EF4-FFF2-40B4-BE49-F238E27FC236}">
-                <a16:creationId xmlns:a16="http://schemas.microsoft.com/office/drawing/2014/main" id="{C7812AC7-6B71-2FC4-D408-FF0293A0F6E8}"/>
-              </a:ext>
-            </a:extLst>
-          </p:cNvPr>
-          <p:cNvSpPr txBox="1"/>
-          <p:nvPr/>
-        </p:nvSpPr>
-        <p:spPr>
-          <a:xfrm>
-            <a:off x="5047858" y="3003717"/>
-            <a:ext cx="4796517" cy="369332"/>
-          </a:xfrm>
-          <a:prstGeom prst="rect">
-            <a:avLst/>
-          </a:prstGeom>
-          <a:noFill/>
-        </p:spPr>
-        <p:txBody>
-          <a:bodyPr wrap="square" rtlCol="0">
-            <a:spAutoFit/>
-          </a:bodyPr>
-          <a:lstStyle/>
-          <a:p>
-            <a:r>
-              <a:rPr lang="en-IN" dirty="0"/>
-              <a:t>Perform data ingestion-data </a:t>
-            </a:r>
-            <a:r>
-              <a:rPr lang="en-IN" dirty="0" err="1"/>
-              <a:t>cleaning,splitting</a:t>
-            </a:r>
-            <a:endParaRPr lang="en-IN" dirty="0"/>
-          </a:p>
-        </p:txBody>
-      </p:sp>
-      <p:sp>
-        <p:nvSpPr>
-          <p:cNvPr id="52" name="TextBox 51">
-            <a:extLst>
-              <a:ext uri="{FF2B5EF4-FFF2-40B4-BE49-F238E27FC236}">
-                <a16:creationId xmlns:a16="http://schemas.microsoft.com/office/drawing/2014/main" id="{823E7345-FB29-317A-9E39-A77E0F9E90F7}"/>
-              </a:ext>
-            </a:extLst>
-          </p:cNvPr>
-          <p:cNvSpPr txBox="1"/>
-          <p:nvPr/>
-        </p:nvSpPr>
-        <p:spPr>
-          <a:xfrm rot="10800000" flipV="1">
-            <a:off x="8024915" y="3435156"/>
-            <a:ext cx="2006749" cy="369332"/>
-          </a:xfrm>
-          <a:prstGeom prst="rect">
-            <a:avLst/>
-          </a:prstGeom>
-          <a:noFill/>
-        </p:spPr>
-        <p:txBody>
-          <a:bodyPr wrap="square" rtlCol="0">
-            <a:spAutoFit/>
-          </a:bodyPr>
-          <a:lstStyle/>
-          <a:p>
-            <a:r>
-              <a:rPr lang="en-IN" dirty="0"/>
-              <a:t>Choose ML task</a:t>
-            </a:r>
-          </a:p>
-        </p:txBody>
-      </p:sp>
-      <p:sp>
-        <p:nvSpPr>
-          <p:cNvPr id="53" name="TextBox 52">
-            <a:extLst>
-              <a:ext uri="{FF2B5EF4-FFF2-40B4-BE49-F238E27FC236}">
-                <a16:creationId xmlns:a16="http://schemas.microsoft.com/office/drawing/2014/main" id="{2F269C5A-4934-33B6-D875-24D97260E8F4}"/>
-              </a:ext>
-            </a:extLst>
-          </p:cNvPr>
-          <p:cNvSpPr txBox="1"/>
-          <p:nvPr/>
-        </p:nvSpPr>
-        <p:spPr>
-          <a:xfrm rot="10800000" flipV="1">
-            <a:off x="7999709" y="3744870"/>
-            <a:ext cx="2225866" cy="369332"/>
-          </a:xfrm>
-          <a:prstGeom prst="rect">
-            <a:avLst/>
-          </a:prstGeom>
-          <a:noFill/>
-        </p:spPr>
-        <p:txBody>
-          <a:bodyPr wrap="square" rtlCol="0">
-            <a:spAutoFit/>
-          </a:bodyPr>
-          <a:lstStyle/>
-          <a:p>
-            <a:r>
-              <a:rPr lang="en-IN" dirty="0"/>
-              <a:t>Run model selection</a:t>
-            </a:r>
-          </a:p>
-        </p:txBody>
-      </p:sp>
-      <p:sp>
-        <p:nvSpPr>
-          <p:cNvPr id="54" name="TextBox 53">
-            <a:extLst>
-              <a:ext uri="{FF2B5EF4-FFF2-40B4-BE49-F238E27FC236}">
-                <a16:creationId xmlns:a16="http://schemas.microsoft.com/office/drawing/2014/main" id="{9A6CBF14-C1A8-35C3-CAD9-2C4D31D6B44A}"/>
-              </a:ext>
-            </a:extLst>
-          </p:cNvPr>
-          <p:cNvSpPr txBox="1"/>
-          <p:nvPr/>
-        </p:nvSpPr>
-        <p:spPr>
-          <a:xfrm>
-            <a:off x="8191500" y="4083733"/>
-            <a:ext cx="1477925" cy="369332"/>
-          </a:xfrm>
-          <a:prstGeom prst="rect">
-            <a:avLst/>
-          </a:prstGeom>
-          <a:noFill/>
-        </p:spPr>
-        <p:txBody>
-          <a:bodyPr wrap="square" rtlCol="0">
-            <a:spAutoFit/>
-          </a:bodyPr>
-          <a:lstStyle/>
-          <a:p>
-            <a:r>
-              <a:rPr lang="en-IN" dirty="0"/>
-              <a:t>Show results</a:t>
-            </a:r>
-          </a:p>
-        </p:txBody>
-      </p:sp>
-      <p:sp>
-        <p:nvSpPr>
-          <p:cNvPr id="55" name="TextBox 54">
-            <a:extLst>
-              <a:ext uri="{FF2B5EF4-FFF2-40B4-BE49-F238E27FC236}">
-                <a16:creationId xmlns:a16="http://schemas.microsoft.com/office/drawing/2014/main" id="{D0067A3B-A1A4-BD76-A253-5FA98BDB99F5}"/>
-              </a:ext>
-            </a:extLst>
-          </p:cNvPr>
-          <p:cNvSpPr txBox="1"/>
-          <p:nvPr/>
-        </p:nvSpPr>
-        <p:spPr>
-          <a:xfrm rot="10800000" flipV="1">
-            <a:off x="7966404" y="4528428"/>
-            <a:ext cx="2072496" cy="369332"/>
-          </a:xfrm>
-          <a:prstGeom prst="rect">
-            <a:avLst/>
-          </a:prstGeom>
-          <a:noFill/>
-        </p:spPr>
-        <p:txBody>
-          <a:bodyPr wrap="square" rtlCol="0">
-            <a:spAutoFit/>
-          </a:bodyPr>
-          <a:lstStyle/>
-          <a:p>
-            <a:r>
-              <a:rPr lang="en-IN" dirty="0"/>
-              <a:t>Download results</a:t>
-            </a:r>
-          </a:p>
-        </p:txBody>
-      </p:sp>
+      </p:pic>
     </p:spTree>
     <p:extLst>
       <p:ext uri="{BB962C8B-B14F-4D97-AF65-F5344CB8AC3E}">
@@ -7932,7 +6266,7 @@
           <p:cNvPr id="4" name="Picture 3">
             <a:extLst>
               <a:ext uri="{FF2B5EF4-FFF2-40B4-BE49-F238E27FC236}">
-                <a16:creationId xmlns:a16="http://schemas.microsoft.com/office/drawing/2014/main" id="{E6DDD82D-3A6B-AC6E-4EF4-9AAABFDFB432}"/>
+                <a16:creationId xmlns:a16="http://schemas.microsoft.com/office/drawing/2014/main" id="{C03CBF0E-090B-2F65-8C37-69AC8999D5CD}"/>
               </a:ext>
             </a:extLst>
           </p:cNvPr>
@@ -7955,8 +6289,8 @@
         </p:blipFill>
         <p:spPr>
           <a:xfrm>
-            <a:off x="2123833" y="867747"/>
-            <a:ext cx="7944334" cy="5411756"/>
+            <a:off x="3517641" y="755780"/>
+            <a:ext cx="3840421" cy="5683120"/>
           </a:xfrm>
           <a:prstGeom prst="rect">
             <a:avLst/>
@@ -8031,6 +6365,42 @@
           </a:p>
         </p:txBody>
       </p:sp>
+      <p:pic>
+        <p:nvPicPr>
+          <p:cNvPr id="4" name="Picture 3">
+            <a:extLst>
+              <a:ext uri="{FF2B5EF4-FFF2-40B4-BE49-F238E27FC236}">
+                <a16:creationId xmlns:a16="http://schemas.microsoft.com/office/drawing/2014/main" id="{187B34FC-09A7-6325-C68E-786BC25799F4}"/>
+              </a:ext>
+            </a:extLst>
+          </p:cNvPr>
+          <p:cNvPicPr>
+            <a:picLocks noChangeAspect="1"/>
+          </p:cNvPicPr>
+          <p:nvPr/>
+        </p:nvPicPr>
+        <p:blipFill>
+          <a:blip r:embed="rId2">
+            <a:extLst>
+              <a:ext uri="{28A0092B-C50C-407E-A947-70E740481C1C}">
+                <a14:useLocalDpi xmlns:a14="http://schemas.microsoft.com/office/drawing/2010/main" val="0"/>
+              </a:ext>
+            </a:extLst>
+          </a:blip>
+          <a:stretch>
+            <a:fillRect/>
+          </a:stretch>
+        </p:blipFill>
+        <p:spPr>
+          <a:xfrm>
+            <a:off x="2007759" y="1073020"/>
+            <a:ext cx="8176481" cy="5561045"/>
+          </a:xfrm>
+          <a:prstGeom prst="rect">
+            <a:avLst/>
+          </a:prstGeom>
+        </p:spPr>
+      </p:pic>
     </p:spTree>
     <p:extLst>
       <p:ext uri="{BB962C8B-B14F-4D97-AF65-F5344CB8AC3E}">
